--- a/docs/content/getting_started/getting_started_lecture.pptx
+++ b/docs/content/getting_started/getting_started_lecture.pptx
@@ -31,6 +31,10 @@
     <p:sldId id="279" r:id="rId25"/>
     <p:sldId id="280" r:id="rId26"/>
     <p:sldId id="281" r:id="rId27"/>
+    <p:sldId id="282" r:id="rId28"/>
+    <p:sldId id="283" r:id="rId29"/>
+    <p:sldId id="284" r:id="rId30"/>
+    <p:sldId id="285" r:id="rId31"/>
   </p:sldIdLst>
   <p:sldSz cx="9144000" cy="5143500" type="screen16x9"/>
   <p:notesSz cx="6858000" cy="9144000"/>
@@ -3457,7 +3461,7 @@
               <a:rPr>
                 <a:latin typeface="Courier"/>
               </a:rPr>
-              <a:t>length_mm</a:t>
+              <a:t>needle_length_mm</a:t>
             </a:r>
             <a:r>
               <a:rPr/>
@@ -3467,11 +3471,60 @@
               <a:rPr>
                 <a:latin typeface="Courier"/>
               </a:rPr>
-              <a:t>Length (mm)</a:t>
-            </a:r>
-            <a:r>
-              <a:rPr/>
-              <a:t> — no spaces, no units hidden in the header text or variable names, all lowercase</a:t>
+              <a:t>Needle Length (mm)</a:t>
+            </a:r>
+            <a:r>
+              <a:rPr/>
+              <a:t> — all lowercase, no spaces, no parentheses</a:t>
+            </a:r>
+          </a:p>
+          <a:p>
+            <a:pPr lvl="0"/>
+            <a:r>
+              <a:rPr b="1"/>
+              <a:t>Put the unit </a:t>
+            </a:r>
+            <a:r>
+              <a:rPr b="1" i="1"/>
+              <a:t>in</a:t>
+            </a:r>
+            <a:r>
+              <a:rPr b="1"/>
+              <a:t> the name as a suffix</a:t>
+            </a:r>
+            <a:r>
+              <a:rPr/>
+              <a:t> (</a:t>
+            </a:r>
+            <a:r>
+              <a:rPr>
+                <a:latin typeface="Courier"/>
+              </a:rPr>
+              <a:t>_mm</a:t>
+            </a:r>
+            <a:r>
+              <a:rPr/>
+              <a:t>, </a:t>
+            </a:r>
+            <a:r>
+              <a:rPr>
+                <a:latin typeface="Courier"/>
+              </a:rPr>
+              <a:t>_g</a:t>
+            </a:r>
+            <a:r>
+              <a:rPr/>
+              <a:t>, </a:t>
+            </a:r>
+            <a:r>
+              <a:rPr>
+                <a:latin typeface="Courier"/>
+              </a:rPr>
+              <a:t>_c</a:t>
+            </a:r>
+            <a:r>
+              <a:rPr/>
+              <a:t>) so it can never get separated from the number</a:t>
             </a:r>
           </a:p>
           <a:p>
@@ -3625,7 +3678,7 @@
 ├── data/       ← raw files, never overwritten
 ├── scripts/    ← your .R code
 ├── figures/    ← plots you save
-└── output/    ← place to save modified data</a:t>
+└── output/     ← place to save modified data</a:t>
             </a:r>
           </a:p>
           <a:p>
@@ -3671,7 +3724,21 @@
             <a:pPr lvl="1"/>
             <a:r>
               <a:rPr/>
-              <a:t>no using set_wd to set the working directory!!! EVER!!!</a:t>
+              <a:t>never call </a:t>
+            </a:r>
+            <a:r>
+              <a:rPr>
+                <a:latin typeface="Courier"/>
+              </a:rPr>
+              <a:t>setwd()</a:t>
+            </a:r>
+            <a:r>
+              <a:rPr/>
+              <a:t> to set the working directory — </a:t>
+            </a:r>
+            <a:r>
+              <a:rPr b="1"/>
+              <a:t>not once, not ever</a:t>
             </a:r>
           </a:p>
           <a:p>
@@ -4785,7 +4852,7 @@
             </a:r>
             <a:r>
               <a:rPr sz="2000"/>
-              <a:t> = a named container holding a value. Look for it appear in the </a:t>
+              <a:t> = a named container holding a value. Watch it appear in the </a:t>
             </a:r>
             <a:r>
               <a:rPr sz="2000" b="1"/>
@@ -5169,22 +5236,211 @@
             </a:pPr>
             <a:r>
               <a:rPr sz="2000"/>
-              <a:t>Predict what </a:t>
+              <a:t>Predict what these return, then run them:</a:t>
+            </a:r>
+          </a:p>
+          <a:p>
+            <a:pPr lvl="0" indent="0">
+              <a:buNone/>
+            </a:pPr>
+            <a:r>
+              <a:rPr>
+                <a:solidFill>
+                  <a:srgbClr val="4758AB"/>
+                </a:solidFill>
+                <a:latin typeface="Courier"/>
+              </a:rPr>
+              <a:t>round</a:t>
+            </a:r>
+            <a:r>
+              <a:rPr>
+                <a:solidFill>
+                  <a:srgbClr val="003B4F"/>
+                </a:solidFill>
+                <a:latin typeface="Courier"/>
+              </a:rPr>
+              <a:t>(</a:t>
+            </a:r>
+            <a:r>
+              <a:rPr>
+                <a:solidFill>
+                  <a:srgbClr val="AD0000"/>
+                </a:solidFill>
+                <a:latin typeface="Courier"/>
+              </a:rPr>
+              <a:t>0.5</a:t>
+            </a:r>
+            <a:r>
+              <a:rPr>
+                <a:solidFill>
+                  <a:srgbClr val="003B4F"/>
+                </a:solidFill>
+                <a:latin typeface="Courier"/>
+              </a:rPr>
+              <a:t>)    </a:t>
+            </a:r>
+            <a:r>
+              <a:rPr>
+                <a:solidFill>
+                  <a:srgbClr val="5E5E5E"/>
+                </a:solidFill>
+                <a:latin typeface="Courier"/>
+              </a:rPr>
+              <a:t># you expect 1 ...</a:t>
+            </a:r>
+            <a:br/>
+            <a:r>
+              <a:rPr>
+                <a:solidFill>
+                  <a:srgbClr val="4758AB"/>
+                </a:solidFill>
+                <a:latin typeface="Courier"/>
+              </a:rPr>
+              <a:t>round</a:t>
+            </a:r>
+            <a:r>
+              <a:rPr>
+                <a:solidFill>
+                  <a:srgbClr val="003B4F"/>
+                </a:solidFill>
+                <a:latin typeface="Courier"/>
+              </a:rPr>
+              <a:t>(</a:t>
+            </a:r>
+            <a:r>
+              <a:rPr>
+                <a:solidFill>
+                  <a:srgbClr val="AD0000"/>
+                </a:solidFill>
+                <a:latin typeface="Courier"/>
+              </a:rPr>
+              <a:t>1.5</a:t>
+            </a:r>
+            <a:r>
+              <a:rPr>
+                <a:solidFill>
+                  <a:srgbClr val="003B4F"/>
+                </a:solidFill>
+                <a:latin typeface="Courier"/>
+              </a:rPr>
+              <a:t>)    </a:t>
+            </a:r>
+            <a:r>
+              <a:rPr>
+                <a:solidFill>
+                  <a:srgbClr val="5E5E5E"/>
+                </a:solidFill>
+                <a:latin typeface="Courier"/>
+              </a:rPr>
+              <a:t># you expect 2 ...</a:t>
+            </a:r>
+            <a:br/>
+            <a:r>
+              <a:rPr>
+                <a:solidFill>
+                  <a:srgbClr val="4758AB"/>
+                </a:solidFill>
+                <a:latin typeface="Courier"/>
+              </a:rPr>
+              <a:t>round</a:t>
+            </a:r>
+            <a:r>
+              <a:rPr>
+                <a:solidFill>
+                  <a:srgbClr val="003B4F"/>
+                </a:solidFill>
+                <a:latin typeface="Courier"/>
+              </a:rPr>
+              <a:t>(</a:t>
+            </a:r>
+            <a:r>
+              <a:rPr>
+                <a:solidFill>
+                  <a:srgbClr val="AD0000"/>
+                </a:solidFill>
+                <a:latin typeface="Courier"/>
+              </a:rPr>
+              <a:t>2.5</a:t>
+            </a:r>
+            <a:r>
+              <a:rPr>
+                <a:solidFill>
+                  <a:srgbClr val="003B4F"/>
+                </a:solidFill>
+                <a:latin typeface="Courier"/>
+              </a:rPr>
+              <a:t>)    </a:t>
+            </a:r>
+            <a:r>
+              <a:rPr>
+                <a:solidFill>
+                  <a:srgbClr val="5E5E5E"/>
+                </a:solidFill>
+                <a:latin typeface="Courier"/>
+              </a:rPr>
+              <a:t># you expect 3 ...</a:t>
+            </a:r>
+          </a:p>
+          <a:p>
+            <a:pPr lvl="0" indent="0" marL="1270000">
+              <a:buNone/>
+            </a:pPr>
+            <a:r>
+              <a:rPr sz="2000"/>
+              <a:t>You get </a:t>
+            </a:r>
+            <a:r>
+              <a:rPr sz="2000" b="1"/>
+              <a:t>0, 2, 2</a:t>
+            </a:r>
+            <a:r>
+              <a:rPr sz="2000"/>
+              <a:t>. R rounds a value ending in exactly </a:t>
             </a:r>
             <a:r>
               <a:rPr sz="2000">
                 <a:latin typeface="Courier"/>
               </a:rPr>
-              <a:t>round(3.14159, 2)</a:t>
+              <a:t>.5</a:t>
             </a:r>
             <a:r>
               <a:rPr sz="2000"/>
-              <a:t> returns before you run it.</a:t>
-            </a:r>
-            <a:br/>
+              <a:t> to the nearest </a:t>
+            </a:r>
+            <a:r>
+              <a:rPr sz="2000" b="1"/>
+              <a:t>even</a:t>
+            </a:r>
             <a:r>
               <a:rPr sz="2000"/>
-              <a:t>Note round in R works odd and you should use round_half_up from janitor</a:t>
+              <a:t> number, not always upward. This is the IEEE 754 standard (“round half to even”), and it is deliberate — it keeps rounding errors from accumulating in one direction.</a:t>
+            </a:r>
+          </a:p>
+          <a:p>
+            <a:pPr lvl="0" indent="0" marL="1270000">
+              <a:buNone/>
+            </a:pPr>
+            <a:r>
+              <a:rPr sz="2000"/>
+              <a:t>If you want the school-textbook rule instead, use </a:t>
+            </a:r>
+            <a:r>
+              <a:rPr sz="2000">
+                <a:latin typeface="Courier"/>
+              </a:rPr>
+              <a:t>janitor::round_half_up()</a:t>
+            </a:r>
+            <a:r>
+              <a:rPr sz="2000"/>
+              <a:t>, which turns those into </a:t>
+            </a:r>
+            <a:r>
+              <a:rPr sz="2000" b="1"/>
+              <a:t>1, 2, 3</a:t>
+            </a:r>
+            <a:r>
+              <a:rPr sz="2000"/>
+              <a:t>.</a:t>
             </a:r>
           </a:p>
         </p:txBody>
@@ -5363,7 +5619,7 @@
                 </a:solidFill>
                 <a:latin typeface="Courier"/>
               </a:rPr>
-              <a:t>length_mm &lt;- </a:t>
+              <a:t>needle_length_mm &lt;- </a:t>
             </a:r>
             <a:r>
               <a:rPr>
@@ -5472,7 +5728,7 @@
                 </a:solidFill>
                 <a:latin typeface="Courier"/>
               </a:rPr>
-              <a:t>side      &lt;- </a:t>
+              <a:t>side             &lt;- </a:t>
             </a:r>
             <a:r>
               <a:rPr>
@@ -5499,7 +5755,7 @@
                 </a:solidFill>
                 <a:latin typeface="Courier"/>
               </a:rPr>
-              <a:t>"n"</a:t>
+              <a:t>"shady"</a:t>
             </a:r>
             <a:r>
               <a:rPr>
@@ -5517,16 +5773,16 @@
                 </a:solidFill>
                 <a:latin typeface="Courier"/>
               </a:rPr>
-              <a:t>"s"</a:t>
-            </a:r>
-            <a:r>
-              <a:rPr>
-                <a:solidFill>
-                  <a:srgbClr val="003B4F"/>
-                </a:solidFill>
-                <a:latin typeface="Courier"/>
-              </a:rPr>
-              <a:t>)            </a:t>
+              <a:t>"sunny"</a:t>
+            </a:r>
+            <a:r>
+              <a:rPr>
+                <a:solidFill>
+                  <a:srgbClr val="003B4F"/>
+                </a:solidFill>
+                <a:latin typeface="Courier"/>
+              </a:rPr>
+              <a:t>)    </a:t>
             </a:r>
             <a:r>
               <a:rPr>
@@ -5614,11 +5870,21 @@
               <a:rPr sz="2000">
                 <a:latin typeface="Courier"/>
               </a:rPr>
-              <a:t>s</a:t>
+              <a:t>shady</a:t>
             </a:r>
             <a:r>
               <a:rPr sz="2000"/>
-              <a:t> means “find an object called s,” not the text “s.”</a:t>
+              <a:t> means “find an object called shady,” not the text </a:t>
+            </a:r>
+            <a:r>
+              <a:rPr sz="2000">
+                <a:latin typeface="Courier"/>
+              </a:rPr>
+              <a:t>"shady"</a:t>
+            </a:r>
+            <a:r>
+              <a:rPr sz="2000"/>
+              <a:t>.</a:t>
             </a:r>
             <a:br/>
             <a:r>
@@ -6282,6 +6548,17 @@
               <a:buNone/>
             </a:pPr>
             <a:r>
+              <a:rPr>
+                <a:hlinkClick r:id="rId2"/>
+              </a:rPr>
+              <a:t>📥 Download the data</a:t>
+            </a:r>
+          </a:p>
+          <a:p>
+            <a:pPr lvl="0" indent="0" marL="0">
+              <a:buNone/>
+            </a:pPr>
+            <a:r>
               <a:rPr/>
               <a:t>Put the file in </a:t>
             </a:r>
@@ -6354,7 +6631,7 @@
                 </a:solidFill>
                 <a:latin typeface="Courier"/>
               </a:rPr>
-              <a:t>"data/pine_needles.csv"</a:t>
+              <a:t>"data/pine_data.csv"</a:t>
             </a:r>
             <a:r>
               <a:rPr>
@@ -6457,7 +6734,20 @@
               <a:rPr sz="2000">
                 <a:latin typeface="Courier"/>
               </a:rPr>
-              <a:t>n_s</a:t>
+              <a:t>team</a:t>
+            </a:r>
+            <a:r>
+              <a:rPr sz="2000"/>
+              <a:t> — which team collected the tree</a:t>
+            </a:r>
+          </a:p>
+          <a:p>
+            <a:pPr lvl="0"/>
+            <a:r>
+              <a:rPr sz="2000">
+                <a:latin typeface="Courier"/>
+              </a:rPr>
+              <a:t>side</a:t>
             </a:r>
             <a:r>
               <a:rPr sz="2000"/>
@@ -6467,39 +6757,6 @@
               <a:rPr sz="2000">
                 <a:latin typeface="Courier"/>
               </a:rPr>
-              <a:t>"n"</a:t>
-            </a:r>
-            <a:r>
-              <a:rPr sz="2000"/>
-              <a:t> (north/sheltered) or </a:t>
-            </a:r>
-            <a:r>
-              <a:rPr sz="2000">
-                <a:latin typeface="Courier"/>
-              </a:rPr>
-              <a:t>"s"</a:t>
-            </a:r>
-            <a:r>
-              <a:rPr sz="2000"/>
-              <a:t> (south/exposed)</a:t>
-            </a:r>
-          </a:p>
-          <a:p>
-            <a:pPr lvl="0"/>
-            <a:r>
-              <a:rPr sz="2000">
-                <a:latin typeface="Courier"/>
-              </a:rPr>
-              <a:t>sun</a:t>
-            </a:r>
-            <a:r>
-              <a:rPr sz="2000"/>
-              <a:t> — </a:t>
-            </a:r>
-            <a:r>
-              <a:rPr sz="2000">
-                <a:latin typeface="Courier"/>
-              </a:rPr>
               <a:t>"shady"</a:t>
             </a:r>
             <a:r>
@@ -6512,9 +6769,18 @@
               </a:rPr>
               <a:t>"sunny"</a:t>
             </a:r>
+          </a:p>
+          <a:p>
+            <a:pPr lvl="0"/>
+            <a:r>
+              <a:rPr sz="2000">
+                <a:latin typeface="Courier"/>
+              </a:rPr>
+              <a:t>replicate</a:t>
+            </a:r>
             <a:r>
               <a:rPr sz="2000"/>
-              <a:t>, same grouping said a different way</a:t>
+              <a:t> — which needle (1–8) within a team-and-side</a:t>
             </a:r>
           </a:p>
           <a:p>
@@ -6523,11 +6789,24 @@
               <a:rPr sz="2000">
                 <a:latin typeface="Courier"/>
               </a:rPr>
-              <a:t>length_mm</a:t>
+              <a:t>needle_length_mm</a:t>
             </a:r>
             <a:r>
               <a:rPr sz="2000"/>
-              <a:t> — needle length in millimeters</a:t>
+              <a:t> — needle length in mm</a:t>
+            </a:r>
+          </a:p>
+          <a:p>
+            <a:pPr lvl="0"/>
+            <a:r>
+              <a:rPr sz="2000">
+                <a:latin typeface="Courier"/>
+              </a:rPr>
+              <a:t>needle_width_mm</a:t>
+            </a:r>
+            <a:r>
+              <a:rPr sz="2000"/>
+              <a:t> — needle width in mm</a:t>
             </a:r>
           </a:p>
         </p:txBody>
@@ -6632,14 +6911,14 @@
               <a:rPr>
                 <a:latin typeface="Courier"/>
               </a:rPr>
-              <a:t>Rows: 48
+              <a:t>Rows: 64
 Columns: 6
-$ date      &lt;chr&gt; "3/20/25", "3/20/25", "3/20/25", "3/20/25", "3/20/25", "3/20…
-$ group     &lt;chr&gt; "cephalopods", "cephalopods", "cephalopods", "cephalopods", …
-$ n_s       &lt;chr&gt; "n", "n", "n", "n", "n", "n", "s", "s", "s", "s", "s", "s", …
-$ sun       &lt;chr&gt; "shady", "shady", "shady", "shady", "shady", "shady", "sunny…
-$ tree_no   &lt;dbl&gt; 1, 1, 1, 1, 1, 1, 1, 1, 1, 1, 1, 1, 2, 2, 2, 2, 2, 2, 2, 2, …
-$ length_mm &lt;dbl&gt; 20, 21, 23, 25, 21, 16, 15, 16, 14, 17, 13, 15, 19, 18, 20, …</a:t>
+$ source_file      &lt;chr&gt; "Bartell_Shingledecker_tree_needle_data_2026.csv", "B…
+$ team             &lt;chr&gt; "grace_jace", "grace_jace", "grace_jace", "grace_jace…
+$ replicate        &lt;dbl&gt; 1, 2, 3, 4, 5, 6, 7, 8, 1, 2, 3, 4, 5, 6, 7, 8, 1, 2,…
+$ side             &lt;chr&gt; "sunny", "sunny", "sunny", "sunny", "sunny", "sunny",…
+$ needle_length_mm &lt;dbl&gt; 18.44, 12.48, 17.73, 13.98, 14.18, 19.17, 10.92, 17.3…
+$ needle_width_mm  &lt;dbl&gt; 0.79, 0.99, 1.12, 0.94, 1.00, 0.99, 0.81, 1.29, 0.75,…</a:t>
             </a:r>
           </a:p>
           <a:p>
@@ -6673,7 +6952,7 @@
               <a:rPr>
                 <a:latin typeface="Courier"/>
               </a:rPr>
-              <a:t>[1] 48  6</a:t>
+              <a:t>[1] 64  6</a:t>
             </a:r>
           </a:p>
           <a:p>
@@ -6699,64 +6978,40 @@
               <a:buNone/>
             </a:pPr>
             <a:r>
-              <a:rPr sz="2000">
-                <a:latin typeface="Courier"/>
-              </a:rPr>
-              <a:t>n_s</a:t>
-            </a:r>
-            <a:r>
               <a:rPr sz="2000"/>
-              <a:t> and </a:t>
-            </a:r>
-            <a:r>
-              <a:rPr sz="2000">
-                <a:latin typeface="Courier"/>
-              </a:rPr>
-              <a:t>sun</a:t>
+              <a:t>64 rows — but only </a:t>
+            </a:r>
+            <a:r>
+              <a:rPr sz="2000" b="1"/>
+              <a:t>4 teams</a:t>
             </a:r>
             <a:r>
               <a:rPr sz="2000"/>
-              <a:t> always travel together — </a:t>
-            </a:r>
-            <a:r>
-              <a:rPr sz="2000">
-                <a:latin typeface="Courier"/>
-              </a:rPr>
-              <a:t>n</a:t>
+              <a:t>, each measuring </a:t>
+            </a:r>
+            <a:r>
+              <a:rPr sz="2000" b="1"/>
+              <a:t>8 needles</a:t>
             </a:r>
             <a:r>
               <a:rPr sz="2000"/>
-              <a:t> with </a:t>
-            </a:r>
-            <a:r>
-              <a:rPr sz="2000">
-                <a:latin typeface="Courier"/>
-              </a:rPr>
-              <a:t>shady</a:t>
+              <a:t> on </a:t>
+            </a:r>
+            <a:r>
+              <a:rPr sz="2000" b="1"/>
+              <a:t>2 sides</a:t>
             </a:r>
             <a:r>
               <a:rPr sz="2000"/>
-              <a:t>, </a:t>
-            </a:r>
-            <a:r>
-              <a:rPr sz="2000">
-                <a:latin typeface="Courier"/>
-              </a:rPr>
-              <a:t>s</a:t>
+              <a:t> of </a:t>
+            </a:r>
+            <a:r>
+              <a:rPr sz="2000" b="1"/>
+              <a:t>one tree</a:t>
             </a:r>
             <a:r>
               <a:rPr sz="2000"/>
-              <a:t> with </a:t>
-            </a:r>
-            <a:r>
-              <a:rPr sz="2000">
-                <a:latin typeface="Courier"/>
-              </a:rPr>
-              <a:t>sunny</a:t>
-            </a:r>
-            <a:r>
-              <a:rPr sz="2000"/>
-              <a:t>. Two columns encoding the same grouping. Useful redundancy, or something to simplify? We’ll revisit this in Wrangling Your Data.</a:t>
+              <a:t>. Rows are not the same thing as independent observations. Hold that thought.</a:t>
             </a:r>
           </a:p>
         </p:txBody>
@@ -7024,7 +7279,7 @@
                 </a:solidFill>
                 <a:latin typeface="Courier"/>
               </a:rPr>
-              <a:t> n_s, </a:t>
+              <a:t> side, </a:t>
             </a:r>
             <a:r>
               <a:rPr>
@@ -7042,7 +7297,7 @@
                 </a:solidFill>
                 <a:latin typeface="Courier"/>
               </a:rPr>
-              <a:t> length_mm)) </a:t>
+              <a:t> needle_length_mm)) </a:t>
             </a:r>
             <a:r>
               <a:rPr>
@@ -7086,7 +7341,7 @@
       </p:sp>
       <p:pic>
         <p:nvPicPr>
-          <p:cNvPr descr="getting_started_lecture_files/figure-pptx/unnamed-chunk-4-1.png" id="0" name="Picture 1"/>
+          <p:cNvPr descr="getting_started_lecture_files/figure-pptx/getting-started-04-1.png" id="0" name="Picture 1"/>
           <p:cNvPicPr>
             <a:picLocks noGrp="1" noChangeAspect="1"/>
           </p:cNvPicPr>
@@ -7345,7 +7600,7 @@
                 </a:solidFill>
                 <a:latin typeface="Courier"/>
               </a:rPr>
-              <a:t> sun, </a:t>
+              <a:t> side, </a:t>
             </a:r>
             <a:r>
               <a:rPr>
@@ -7363,7 +7618,7 @@
                 </a:solidFill>
                 <a:latin typeface="Courier"/>
               </a:rPr>
-              <a:t> length_mm)) </a:t>
+              <a:t> needle_length_mm)) </a:t>
             </a:r>
             <a:r>
               <a:rPr>
@@ -7717,7 +7972,7 @@
       </p:sp>
       <p:pic>
         <p:nvPicPr>
-          <p:cNvPr descr="getting_started_lecture_files/figure-pptx/unnamed-chunk-5-1.png" id="0" name="Picture 1"/>
+          <p:cNvPr descr="getting_started_lecture_files/figure-pptx/getting-started-05-1.png" id="0" name="Picture 1"/>
           <p:cNvPicPr>
             <a:picLocks noGrp="1" noChangeAspect="1"/>
           </p:cNvPicPr>
@@ -7789,7 +8044,7 @@
               <a:rPr sz="2000">
                 <a:latin typeface="Courier"/>
               </a:rPr>
-              <a:t>sun</a:t>
+              <a:t>side</a:t>
             </a:r>
             <a:r>
               <a:rPr sz="2000"/>
@@ -7799,11 +8054,19 @@
               <a:rPr sz="2000">
                 <a:latin typeface="Courier"/>
               </a:rPr>
-              <a:t>group</a:t>
+              <a:t>team</a:t>
             </a:r>
             <a:r>
               <a:rPr sz="2000"/>
-              <a:t>. What does that plot tell you instead?</a:t>
+              <a:t>. That plot answers a different question — </a:t>
+            </a:r>
+            <a:r>
+              <a:rPr sz="2000" i="1"/>
+              <a:t>how much do the four teams differ from each other?</a:t>
+            </a:r>
+            <a:r>
+              <a:rPr sz="2000"/>
+              <a:t> Keep the answer in mind for the next slide.</a:t>
             </a:r>
           </a:p>
         </p:txBody>
@@ -7886,11 +8149,8 @@
         <p:spPr>
           <a:xfrm>
             <a:off x="0" y="0"/>
-            <a:ext cx="9144000" cy="602780"/>
+            <a:ext cx="9144000" cy="582780"/>
           </a:xfrm>
-          <a:solidFill>
-            <a:srgbClr val="70121D"/>
-          </a:solidFill>
         </p:spPr>
         <p:txBody>
           <a:bodyPr/>
@@ -7901,732 +8161,7 @@
             </a:pPr>
             <a:r>
               <a:rPr/>
-              <a:t>Save your plot</a:t>
-            </a:r>
-          </a:p>
-        </p:txBody>
-      </p:sp>
-      <p:sp>
-        <p:nvSpPr>
-          <p:cNvPr id="3" name="Content Placeholder 2"/>
-          <p:cNvSpPr>
-            <a:spLocks noGrp="1"/>
-          </p:cNvSpPr>
-          <p:nvPr>
-            <p:ph idx="1" sz="half"/>
-          </p:nvPr>
-        </p:nvSpPr>
-        <p:spPr/>
-        <p:txBody>
-          <a:bodyPr/>
-          <a:lstStyle/>
-          <a:p>
-            <a:pPr lvl="0" indent="0">
-              <a:buNone/>
-            </a:pPr>
-            <a:r>
-              <a:rPr>
-                <a:solidFill>
-                  <a:srgbClr val="003B4F"/>
-                </a:solidFill>
-                <a:latin typeface="Courier"/>
-              </a:rPr>
-              <a:t>needle_plot &lt;- </a:t>
-            </a:r>
-            <a:r>
-              <a:rPr>
-                <a:solidFill>
-                  <a:srgbClr val="4758AB"/>
-                </a:solidFill>
-                <a:latin typeface="Courier"/>
-              </a:rPr>
-              <a:t>ggplot</a:t>
-            </a:r>
-            <a:r>
-              <a:rPr>
-                <a:solidFill>
-                  <a:srgbClr val="003B4F"/>
-                </a:solidFill>
-                <a:latin typeface="Courier"/>
-              </a:rPr>
-              <a:t>(pine_df, </a:t>
-            </a:r>
-            <a:r>
-              <a:rPr>
-                <a:solidFill>
-                  <a:srgbClr val="4758AB"/>
-                </a:solidFill>
-                <a:latin typeface="Courier"/>
-              </a:rPr>
-              <a:t>aes</a:t>
-            </a:r>
-            <a:r>
-              <a:rPr>
-                <a:solidFill>
-                  <a:srgbClr val="003B4F"/>
-                </a:solidFill>
-                <a:latin typeface="Courier"/>
-              </a:rPr>
-              <a:t>(</a:t>
-            </a:r>
-            <a:r>
-              <a:rPr>
-                <a:solidFill>
-                  <a:srgbClr val="657422"/>
-                </a:solidFill>
-                <a:latin typeface="Courier"/>
-              </a:rPr>
-              <a:t>x =</a:t>
-            </a:r>
-            <a:r>
-              <a:rPr>
-                <a:solidFill>
-                  <a:srgbClr val="003B4F"/>
-                </a:solidFill>
-                <a:latin typeface="Courier"/>
-              </a:rPr>
-              <a:t> sun, </a:t>
-            </a:r>
-            <a:r>
-              <a:rPr>
-                <a:solidFill>
-                  <a:srgbClr val="657422"/>
-                </a:solidFill>
-                <a:latin typeface="Courier"/>
-              </a:rPr>
-              <a:t>y =</a:t>
-            </a:r>
-            <a:r>
-              <a:rPr>
-                <a:solidFill>
-                  <a:srgbClr val="003B4F"/>
-                </a:solidFill>
-                <a:latin typeface="Courier"/>
-              </a:rPr>
-              <a:t> length_mm)) </a:t>
-            </a:r>
-            <a:r>
-              <a:rPr>
-                <a:solidFill>
-                  <a:srgbClr val="5E5E5E"/>
-                </a:solidFill>
-                <a:latin typeface="Courier"/>
-              </a:rPr>
-              <a:t>+</a:t>
-            </a:r>
-            <a:br/>
-            <a:r>
-              <a:rPr>
-                <a:solidFill>
-                  <a:srgbClr val="003B4F"/>
-                </a:solidFill>
-                <a:latin typeface="Courier"/>
-              </a:rPr>
-              <a:t>  </a:t>
-            </a:r>
-            <a:r>
-              <a:rPr>
-                <a:solidFill>
-                  <a:srgbClr val="4758AB"/>
-                </a:solidFill>
-                <a:latin typeface="Courier"/>
-              </a:rPr>
-              <a:t>geom_boxplot</a:t>
-            </a:r>
-            <a:r>
-              <a:rPr>
-                <a:solidFill>
-                  <a:srgbClr val="003B4F"/>
-                </a:solidFill>
-                <a:latin typeface="Courier"/>
-              </a:rPr>
-              <a:t>() </a:t>
-            </a:r>
-            <a:r>
-              <a:rPr>
-                <a:solidFill>
-                  <a:srgbClr val="5E5E5E"/>
-                </a:solidFill>
-                <a:latin typeface="Courier"/>
-              </a:rPr>
-              <a:t>+</a:t>
-            </a:r>
-            <a:br/>
-            <a:r>
-              <a:rPr>
-                <a:solidFill>
-                  <a:srgbClr val="003B4F"/>
-                </a:solidFill>
-                <a:latin typeface="Courier"/>
-              </a:rPr>
-              <a:t>  </a:t>
-            </a:r>
-            <a:r>
-              <a:rPr>
-                <a:solidFill>
-                  <a:srgbClr val="4758AB"/>
-                </a:solidFill>
-                <a:latin typeface="Courier"/>
-              </a:rPr>
-              <a:t>geom_jitter</a:t>
-            </a:r>
-            <a:r>
-              <a:rPr>
-                <a:solidFill>
-                  <a:srgbClr val="003B4F"/>
-                </a:solidFill>
-                <a:latin typeface="Courier"/>
-              </a:rPr>
-              <a:t>(</a:t>
-            </a:r>
-            <a:r>
-              <a:rPr>
-                <a:solidFill>
-                  <a:srgbClr val="657422"/>
-                </a:solidFill>
-                <a:latin typeface="Courier"/>
-              </a:rPr>
-              <a:t>width =</a:t>
-            </a:r>
-            <a:r>
-              <a:rPr>
-                <a:solidFill>
-                  <a:srgbClr val="003B4F"/>
-                </a:solidFill>
-                <a:latin typeface="Courier"/>
-              </a:rPr>
-              <a:t> </a:t>
-            </a:r>
-            <a:r>
-              <a:rPr>
-                <a:solidFill>
-                  <a:srgbClr val="AD0000"/>
-                </a:solidFill>
-                <a:latin typeface="Courier"/>
-              </a:rPr>
-              <a:t>0.15</a:t>
-            </a:r>
-            <a:r>
-              <a:rPr>
-                <a:solidFill>
-                  <a:srgbClr val="003B4F"/>
-                </a:solidFill>
-                <a:latin typeface="Courier"/>
-              </a:rPr>
-              <a:t>, </a:t>
-            </a:r>
-            <a:r>
-              <a:rPr>
-                <a:solidFill>
-                  <a:srgbClr val="657422"/>
-                </a:solidFill>
-                <a:latin typeface="Courier"/>
-              </a:rPr>
-              <a:t>alpha =</a:t>
-            </a:r>
-            <a:r>
-              <a:rPr>
-                <a:solidFill>
-                  <a:srgbClr val="003B4F"/>
-                </a:solidFill>
-                <a:latin typeface="Courier"/>
-              </a:rPr>
-              <a:t> </a:t>
-            </a:r>
-            <a:r>
-              <a:rPr>
-                <a:solidFill>
-                  <a:srgbClr val="AD0000"/>
-                </a:solidFill>
-                <a:latin typeface="Courier"/>
-              </a:rPr>
-              <a:t>0.6</a:t>
-            </a:r>
-            <a:r>
-              <a:rPr>
-                <a:solidFill>
-                  <a:srgbClr val="003B4F"/>
-                </a:solidFill>
-                <a:latin typeface="Courier"/>
-              </a:rPr>
-              <a:t>, </a:t>
-            </a:r>
-            <a:r>
-              <a:rPr>
-                <a:solidFill>
-                  <a:srgbClr val="657422"/>
-                </a:solidFill>
-                <a:latin typeface="Courier"/>
-              </a:rPr>
-              <a:t>color =</a:t>
-            </a:r>
-            <a:r>
-              <a:rPr>
-                <a:solidFill>
-                  <a:srgbClr val="003B4F"/>
-                </a:solidFill>
-                <a:latin typeface="Courier"/>
-              </a:rPr>
-              <a:t> </a:t>
-            </a:r>
-            <a:r>
-              <a:rPr>
-                <a:solidFill>
-                  <a:srgbClr val="20794D"/>
-                </a:solidFill>
-                <a:latin typeface="Courier"/>
-              </a:rPr>
-              <a:t>"tomato"</a:t>
-            </a:r>
-            <a:r>
-              <a:rPr>
-                <a:solidFill>
-                  <a:srgbClr val="003B4F"/>
-                </a:solidFill>
-                <a:latin typeface="Courier"/>
-              </a:rPr>
-              <a:t>) </a:t>
-            </a:r>
-            <a:r>
-              <a:rPr>
-                <a:solidFill>
-                  <a:srgbClr val="5E5E5E"/>
-                </a:solidFill>
-                <a:latin typeface="Courier"/>
-              </a:rPr>
-              <a:t>+</a:t>
-            </a:r>
-            <a:br/>
-            <a:r>
-              <a:rPr>
-                <a:solidFill>
-                  <a:srgbClr val="003B4F"/>
-                </a:solidFill>
-                <a:latin typeface="Courier"/>
-              </a:rPr>
-              <a:t>  </a:t>
-            </a:r>
-            <a:r>
-              <a:rPr>
-                <a:solidFill>
-                  <a:srgbClr val="4758AB"/>
-                </a:solidFill>
-                <a:latin typeface="Courier"/>
-              </a:rPr>
-              <a:t>labs</a:t>
-            </a:r>
-            <a:r>
-              <a:rPr>
-                <a:solidFill>
-                  <a:srgbClr val="003B4F"/>
-                </a:solidFill>
-                <a:latin typeface="Courier"/>
-              </a:rPr>
-              <a:t>(</a:t>
-            </a:r>
-            <a:r>
-              <a:rPr>
-                <a:solidFill>
-                  <a:srgbClr val="657422"/>
-                </a:solidFill>
-                <a:latin typeface="Courier"/>
-              </a:rPr>
-              <a:t>x =</a:t>
-            </a:r>
-            <a:r>
-              <a:rPr>
-                <a:solidFill>
-                  <a:srgbClr val="003B4F"/>
-                </a:solidFill>
-                <a:latin typeface="Courier"/>
-              </a:rPr>
-              <a:t> </a:t>
-            </a:r>
-            <a:r>
-              <a:rPr>
-                <a:solidFill>
-                  <a:srgbClr val="20794D"/>
-                </a:solidFill>
-                <a:latin typeface="Courier"/>
-              </a:rPr>
-              <a:t>"Sun exposure"</a:t>
-            </a:r>
-            <a:r>
-              <a:rPr>
-                <a:solidFill>
-                  <a:srgbClr val="003B4F"/>
-                </a:solidFill>
-                <a:latin typeface="Courier"/>
-              </a:rPr>
-              <a:t>, </a:t>
-            </a:r>
-            <a:r>
-              <a:rPr>
-                <a:solidFill>
-                  <a:srgbClr val="657422"/>
-                </a:solidFill>
-                <a:latin typeface="Courier"/>
-              </a:rPr>
-              <a:t>y =</a:t>
-            </a:r>
-            <a:r>
-              <a:rPr>
-                <a:solidFill>
-                  <a:srgbClr val="003B4F"/>
-                </a:solidFill>
-                <a:latin typeface="Courier"/>
-              </a:rPr>
-              <a:t> </a:t>
-            </a:r>
-            <a:r>
-              <a:rPr>
-                <a:solidFill>
-                  <a:srgbClr val="20794D"/>
-                </a:solidFill>
-                <a:latin typeface="Courier"/>
-              </a:rPr>
-              <a:t>"Needle length (mm)"</a:t>
-            </a:r>
-            <a:r>
-              <a:rPr>
-                <a:solidFill>
-                  <a:srgbClr val="003B4F"/>
-                </a:solidFill>
-                <a:latin typeface="Courier"/>
-              </a:rPr>
-              <a:t>)</a:t>
-            </a:r>
-            <a:br/>
-            <a:br/>
-            <a:r>
-              <a:rPr>
-                <a:solidFill>
-                  <a:srgbClr val="4758AB"/>
-                </a:solidFill>
-                <a:latin typeface="Courier"/>
-              </a:rPr>
-              <a:t>ggsave</a:t>
-            </a:r>
-            <a:r>
-              <a:rPr>
-                <a:solidFill>
-                  <a:srgbClr val="003B4F"/>
-                </a:solidFill>
-                <a:latin typeface="Courier"/>
-              </a:rPr>
-              <a:t>(</a:t>
-            </a:r>
-            <a:r>
-              <a:rPr>
-                <a:solidFill>
-                  <a:srgbClr val="20794D"/>
-                </a:solidFill>
-                <a:latin typeface="Courier"/>
-              </a:rPr>
-              <a:t>"figures/needle_length.png"</a:t>
-            </a:r>
-            <a:r>
-              <a:rPr>
-                <a:solidFill>
-                  <a:srgbClr val="003B4F"/>
-                </a:solidFill>
-                <a:latin typeface="Courier"/>
-              </a:rPr>
-              <a:t>,</a:t>
-            </a:r>
-            <a:br/>
-            <a:r>
-              <a:rPr>
-                <a:solidFill>
-                  <a:srgbClr val="003B4F"/>
-                </a:solidFill>
-                <a:latin typeface="Courier"/>
-              </a:rPr>
-              <a:t>       </a:t>
-            </a:r>
-            <a:r>
-              <a:rPr>
-                <a:solidFill>
-                  <a:srgbClr val="657422"/>
-                </a:solidFill>
-                <a:latin typeface="Courier"/>
-              </a:rPr>
-              <a:t>plot =</a:t>
-            </a:r>
-            <a:r>
-              <a:rPr>
-                <a:solidFill>
-                  <a:srgbClr val="003B4F"/>
-                </a:solidFill>
-                <a:latin typeface="Courier"/>
-              </a:rPr>
-              <a:t> needle_plot,</a:t>
-            </a:r>
-            <a:br/>
-            <a:r>
-              <a:rPr>
-                <a:solidFill>
-                  <a:srgbClr val="003B4F"/>
-                </a:solidFill>
-                <a:latin typeface="Courier"/>
-              </a:rPr>
-              <a:t>       </a:t>
-            </a:r>
-            <a:r>
-              <a:rPr>
-                <a:solidFill>
-                  <a:srgbClr val="657422"/>
-                </a:solidFill>
-                <a:latin typeface="Courier"/>
-              </a:rPr>
-              <a:t>width =</a:t>
-            </a:r>
-            <a:r>
-              <a:rPr>
-                <a:solidFill>
-                  <a:srgbClr val="003B4F"/>
-                </a:solidFill>
-                <a:latin typeface="Courier"/>
-              </a:rPr>
-              <a:t> </a:t>
-            </a:r>
-            <a:r>
-              <a:rPr>
-                <a:solidFill>
-                  <a:srgbClr val="AD0000"/>
-                </a:solidFill>
-                <a:latin typeface="Courier"/>
-              </a:rPr>
-              <a:t>3</a:t>
-            </a:r>
-            <a:r>
-              <a:rPr>
-                <a:solidFill>
-                  <a:srgbClr val="003B4F"/>
-                </a:solidFill>
-                <a:latin typeface="Courier"/>
-              </a:rPr>
-              <a:t>, </a:t>
-            </a:r>
-            <a:r>
-              <a:rPr>
-                <a:solidFill>
-                  <a:srgbClr val="657422"/>
-                </a:solidFill>
-                <a:latin typeface="Courier"/>
-              </a:rPr>
-              <a:t>height =</a:t>
-            </a:r>
-            <a:r>
-              <a:rPr>
-                <a:solidFill>
-                  <a:srgbClr val="003B4F"/>
-                </a:solidFill>
-                <a:latin typeface="Courier"/>
-              </a:rPr>
-              <a:t> </a:t>
-            </a:r>
-            <a:r>
-              <a:rPr>
-                <a:solidFill>
-                  <a:srgbClr val="AD0000"/>
-                </a:solidFill>
-                <a:latin typeface="Courier"/>
-              </a:rPr>
-              <a:t>3</a:t>
-            </a:r>
-            <a:r>
-              <a:rPr>
-                <a:solidFill>
-                  <a:srgbClr val="003B4F"/>
-                </a:solidFill>
-                <a:latin typeface="Courier"/>
-              </a:rPr>
-              <a:t>, </a:t>
-            </a:r>
-            <a:r>
-              <a:rPr>
-                <a:solidFill>
-                  <a:srgbClr val="657422"/>
-                </a:solidFill>
-                <a:latin typeface="Courier"/>
-              </a:rPr>
-              <a:t>units =</a:t>
-            </a:r>
-            <a:r>
-              <a:rPr>
-                <a:solidFill>
-                  <a:srgbClr val="003B4F"/>
-                </a:solidFill>
-                <a:latin typeface="Courier"/>
-              </a:rPr>
-              <a:t> </a:t>
-            </a:r>
-            <a:r>
-              <a:rPr>
-                <a:solidFill>
-                  <a:srgbClr val="20794D"/>
-                </a:solidFill>
-                <a:latin typeface="Courier"/>
-              </a:rPr>
-              <a:t>"in"</a:t>
-            </a:r>
-            <a:r>
-              <a:rPr>
-                <a:solidFill>
-                  <a:srgbClr val="003B4F"/>
-                </a:solidFill>
-                <a:latin typeface="Courier"/>
-              </a:rPr>
-              <a:t>, </a:t>
-            </a:r>
-            <a:r>
-              <a:rPr>
-                <a:solidFill>
-                  <a:srgbClr val="657422"/>
-                </a:solidFill>
-                <a:latin typeface="Courier"/>
-              </a:rPr>
-              <a:t>dpi =</a:t>
-            </a:r>
-            <a:r>
-              <a:rPr>
-                <a:solidFill>
-                  <a:srgbClr val="003B4F"/>
-                </a:solidFill>
-                <a:latin typeface="Courier"/>
-              </a:rPr>
-              <a:t> </a:t>
-            </a:r>
-            <a:r>
-              <a:rPr>
-                <a:solidFill>
-                  <a:srgbClr val="AD0000"/>
-                </a:solidFill>
-                <a:latin typeface="Courier"/>
-              </a:rPr>
-              <a:t>300</a:t>
-            </a:r>
-            <a:r>
-              <a:rPr>
-                <a:solidFill>
-                  <a:srgbClr val="003B4F"/>
-                </a:solidFill>
-                <a:latin typeface="Courier"/>
-              </a:rPr>
-              <a:t>)</a:t>
-            </a:r>
-          </a:p>
-          <a:p>
-            <a:pPr lvl="0" indent="0" marL="1270000">
-              <a:buNone/>
-            </a:pPr>
-            <a:r>
-              <a:rPr sz="2000" b="1"/>
-              <a:t>Warning</a:t>
-            </a:r>
-          </a:p>
-          <a:p>
-            <a:pPr lvl="0" indent="0" marL="1270000">
-              <a:buNone/>
-            </a:pPr>
-            <a:r>
-              <a:rPr sz="2000" b="1"/>
-              <a:t>⚠️ Watch out!</a:t>
-            </a:r>
-          </a:p>
-          <a:p>
-            <a:pPr lvl="0" indent="0" marL="1270000">
-              <a:buNone/>
-            </a:pPr>
-            <a:r>
-              <a:rPr sz="2000">
-                <a:latin typeface="Courier"/>
-              </a:rPr>
-              <a:t>ggsave()</a:t>
-            </a:r>
-            <a:r>
-              <a:rPr sz="2000"/>
-              <a:t> wants the </a:t>
-            </a:r>
-            <a:r>
-              <a:rPr sz="2000" b="1"/>
-              <a:t>filename first</a:t>
-            </a:r>
-            <a:r>
-              <a:rPr sz="2000"/>
-              <a:t>, then </a:t>
-            </a:r>
-            <a:r>
-              <a:rPr sz="2000">
-                <a:latin typeface="Courier"/>
-              </a:rPr>
-              <a:t>plot =</a:t>
-            </a:r>
-            <a:r>
-              <a:rPr sz="2000"/>
-              <a:t>. Always use </a:t>
-            </a:r>
-            <a:r>
-              <a:rPr sz="2000">
-                <a:latin typeface="Courier"/>
-              </a:rPr>
-              <a:t>dpi = 300</a:t>
-            </a:r>
-            <a:r>
-              <a:rPr sz="2000"/>
-              <a:t> — print/poster quality.</a:t>
-            </a:r>
-          </a:p>
-        </p:txBody>
-      </p:sp>
-      <p:sp>
-        <p:nvSpPr>
-          <p:cNvPr id="4" name="Content Placeholder 3"/>
-          <p:cNvSpPr>
-            <a:spLocks noGrp="1"/>
-          </p:cNvSpPr>
-          <p:nvPr>
-            <p:ph idx="2" sz="half"/>
-          </p:nvPr>
-        </p:nvSpPr>
-        <p:spPr/>
-        <p:txBody>
-          <a:bodyPr/>
-          <a:lstStyle/>
-          <a:p>
-            <a:pPr lvl="0" indent="0" marL="1270000">
-              <a:buNone/>
-            </a:pPr>
-            <a:r>
-              <a:rPr sz="2000" b="1"/>
-              <a:t>Note</a:t>
-            </a:r>
-          </a:p>
-          <a:p>
-            <a:pPr lvl="0" indent="0" marL="1270000">
-              <a:buNone/>
-            </a:pPr>
-            <a:r>
-              <a:rPr sz="2000" b="1"/>
-              <a:t>📖 File format tip</a:t>
-            </a:r>
-          </a:p>
-          <a:p>
-            <a:pPr lvl="0" indent="0" marL="1270000">
-              <a:buNone/>
-            </a:pPr>
-            <a:r>
-              <a:rPr sz="2000"/>
-              <a:t>Save figures as </a:t>
-            </a:r>
-            <a:r>
-              <a:rPr sz="2000" b="1"/>
-              <a:t>PNG</a:t>
-            </a:r>
-            <a:r>
-              <a:rPr sz="2000"/>
-              <a:t> for reports and submissions.</a:t>
+              <a:t>Part 5 · 64 Rows, But How Many Observations?</a:t>
             </a:r>
           </a:p>
         </p:txBody>
@@ -8665,12 +8200,9 @@
         </p:nvSpPr>
         <p:spPr>
           <a:xfrm>
-            <a:off x="0" y="0"/>
-            <a:ext cx="9144000" cy="602780"/>
+            <a:off x="139485" y="78119"/>
+            <a:ext cx="8229600" cy="607682"/>
           </a:xfrm>
-          <a:solidFill>
-            <a:srgbClr val="70121D"/>
-          </a:solidFill>
         </p:spPr>
         <p:txBody>
           <a:bodyPr/>
@@ -8681,19 +8213,19 @@
             </a:pPr>
             <a:r>
               <a:rPr/>
-              <a:t>Wrap-up</a:t>
-            </a:r>
-          </a:p>
-        </p:txBody>
-      </p:sp>
-      <p:sp>
-        <p:nvSpPr>
-          <p:cNvPr id="3" name="Content Placeholder 2"/>
-          <p:cNvSpPr>
-            <a:spLocks noGrp="1"/>
-          </p:cNvSpPr>
-          <p:nvPr>
-            <p:ph idx="1" sz="half"/>
+              <a:t>The tempting (wrong) picture</a:t>
+            </a:r>
+          </a:p>
+        </p:txBody>
+      </p:sp>
+      <p:sp>
+        <p:nvSpPr>
+          <p:cNvPr id="3" name="Text Placeholder 2"/>
+          <p:cNvSpPr>
+            <a:spLocks noGrp="1"/>
+          </p:cNvSpPr>
+          <p:nvPr>
+            <p:ph idx="1" type="body"/>
           </p:nvPr>
         </p:nvSpPr>
         <p:spPr/>
@@ -8706,134 +8238,489 @@
             </a:pPr>
             <a:r>
               <a:rPr/>
-              <a:t>Today you:</a:t>
-            </a:r>
-          </a:p>
-          <a:p>
-            <a:pPr lvl="0"/>
-            <a:r>
-              <a:rPr/>
-              <a:t>Turned a question into a testable </a:t>
+              <a:t>The boxplot you just made pooled all </a:t>
             </a:r>
             <a:r>
               <a:rPr b="1"/>
-              <a:t>H₀ / Hₐ</a:t>
-            </a:r>
-          </a:p>
-          <a:p>
-            <a:pPr lvl="0"/>
-            <a:r>
-              <a:rPr/>
-              <a:t>Organized a project folder with </a:t>
-            </a:r>
-            <a:r>
-              <a:rPr b="1"/>
-              <a:t>data/scripts/figures</a:t>
-            </a:r>
-          </a:p>
-          <a:p>
-            <a:pPr lvl="0"/>
-            <a:r>
-              <a:rPr/>
-              <a:t>Ran your first R code — objects, functions, vectors, packages</a:t>
-            </a:r>
-          </a:p>
-          <a:p>
-            <a:pPr lvl="0"/>
-            <a:r>
-              <a:rPr/>
-              <a:t>Loaded real data and made — and saved — your </a:t>
-            </a:r>
-            <a:r>
-              <a:rPr b="1"/>
-              <a:t>first </a:t>
-            </a:r>
-            <a:r>
-              <a:rPr b="1">
+              <a:t>64 needles</a:t>
+            </a:r>
+            <a:r>
+              <a:rPr/>
+              <a:t> as if each were an independent measurement:</a:t>
+            </a:r>
+          </a:p>
+          <a:p>
+            <a:pPr lvl="0" indent="0">
+              <a:buNone/>
+            </a:pPr>
+            <a:r>
+              <a:rPr>
+                <a:solidFill>
+                  <a:srgbClr val="4758AB"/>
+                </a:solidFill>
                 <a:latin typeface="Courier"/>
               </a:rPr>
               <a:t>ggplot</a:t>
             </a:r>
-          </a:p>
-          <a:p>
-            <a:pPr lvl="0" indent="0" marL="1270000">
-              <a:buNone/>
-            </a:pPr>
-            <a:r>
-              <a:rPr sz="2000" b="1"/>
-              <a:t>Tip</a:t>
-            </a:r>
-          </a:p>
-          <a:p>
-            <a:pPr lvl="0" indent="0" marL="1270000">
-              <a:buNone/>
-            </a:pPr>
-            <a:r>
-              <a:rPr sz="2000" b="1"/>
-              <a:t>🖐 Before next class</a:t>
-            </a:r>
-          </a:p>
-          <a:p>
-            <a:pPr lvl="0" indent="0" marL="1270000">
-              <a:buNone/>
-            </a:pPr>
-            <a:r>
-              <a:rPr sz="2000"/>
-              <a:t>Finish the worksheet: load </a:t>
-            </a:r>
-            <a:r>
-              <a:rPr sz="2000">
-                <a:latin typeface="Courier"/>
-              </a:rPr>
-              <a:t>pine_needles.csv</a:t>
-            </a:r>
-            <a:r>
-              <a:rPr sz="2000"/>
-              <a:t>, run </a:t>
-            </a:r>
-            <a:r>
-              <a:rPr sz="2000">
-                <a:latin typeface="Courier"/>
-              </a:rPr>
-              <a:t>glimpse()</a:t>
-            </a:r>
-            <a:r>
-              <a:rPr sz="2000"/>
-              <a:t>, and make one more plot — </a:t>
-            </a:r>
-            <a:r>
-              <a:rPr sz="2000">
-                <a:latin typeface="Courier"/>
-              </a:rPr>
-              <a:t>length_mm</a:t>
-            </a:r>
-            <a:r>
-              <a:rPr sz="2000"/>
-              <a:t> by </a:t>
-            </a:r>
-            <a:r>
-              <a:rPr sz="2000">
-                <a:latin typeface="Courier"/>
-              </a:rPr>
-              <a:t>n_s</a:t>
-            </a:r>
-            <a:r>
-              <a:rPr sz="2000"/>
-              <a:t> this time. Save it to </a:t>
-            </a:r>
-            <a:r>
-              <a:rPr sz="2000">
-                <a:latin typeface="Courier"/>
-              </a:rPr>
-              <a:t>figures/</a:t>
-            </a:r>
-            <a:r>
-              <a:rPr sz="2000"/>
-              <a:t>.</a:t>
-            </a:r>
-          </a:p>
-        </p:txBody>
-      </p:sp>
+            <a:r>
+              <a:rPr>
+                <a:solidFill>
+                  <a:srgbClr val="003B4F"/>
+                </a:solidFill>
+                <a:latin typeface="Courier"/>
+              </a:rPr>
+              <a:t>(pine_df, </a:t>
+            </a:r>
+            <a:r>
+              <a:rPr>
+                <a:solidFill>
+                  <a:srgbClr val="4758AB"/>
+                </a:solidFill>
+                <a:latin typeface="Courier"/>
+              </a:rPr>
+              <a:t>aes</a:t>
+            </a:r>
+            <a:r>
+              <a:rPr>
+                <a:solidFill>
+                  <a:srgbClr val="003B4F"/>
+                </a:solidFill>
+                <a:latin typeface="Courier"/>
+              </a:rPr>
+              <a:t>(</a:t>
+            </a:r>
+            <a:r>
+              <a:rPr>
+                <a:solidFill>
+                  <a:srgbClr val="657422"/>
+                </a:solidFill>
+                <a:latin typeface="Courier"/>
+              </a:rPr>
+              <a:t>x =</a:t>
+            </a:r>
+            <a:r>
+              <a:rPr>
+                <a:solidFill>
+                  <a:srgbClr val="003B4F"/>
+                </a:solidFill>
+                <a:latin typeface="Courier"/>
+              </a:rPr>
+              <a:t> side, </a:t>
+            </a:r>
+            <a:r>
+              <a:rPr>
+                <a:solidFill>
+                  <a:srgbClr val="657422"/>
+                </a:solidFill>
+                <a:latin typeface="Courier"/>
+              </a:rPr>
+              <a:t>y =</a:t>
+            </a:r>
+            <a:r>
+              <a:rPr>
+                <a:solidFill>
+                  <a:srgbClr val="003B4F"/>
+                </a:solidFill>
+                <a:latin typeface="Courier"/>
+              </a:rPr>
+              <a:t> needle_length_mm)) </a:t>
+            </a:r>
+            <a:r>
+              <a:rPr>
+                <a:solidFill>
+                  <a:srgbClr val="5E5E5E"/>
+                </a:solidFill>
+                <a:latin typeface="Courier"/>
+              </a:rPr>
+              <a:t>+</a:t>
+            </a:r>
+            <a:br/>
+            <a:r>
+              <a:rPr>
+                <a:solidFill>
+                  <a:srgbClr val="003B4F"/>
+                </a:solidFill>
+                <a:latin typeface="Courier"/>
+              </a:rPr>
+              <a:t>  </a:t>
+            </a:r>
+            <a:r>
+              <a:rPr>
+                <a:solidFill>
+                  <a:srgbClr val="4758AB"/>
+                </a:solidFill>
+                <a:latin typeface="Courier"/>
+              </a:rPr>
+              <a:t>geom_boxplot</a:t>
+            </a:r>
+            <a:r>
+              <a:rPr>
+                <a:solidFill>
+                  <a:srgbClr val="003B4F"/>
+                </a:solidFill>
+                <a:latin typeface="Courier"/>
+              </a:rPr>
+              <a:t>(</a:t>
+            </a:r>
+            <a:r>
+              <a:rPr>
+                <a:solidFill>
+                  <a:srgbClr val="657422"/>
+                </a:solidFill>
+                <a:latin typeface="Courier"/>
+              </a:rPr>
+              <a:t>outlier.shape =</a:t>
+            </a:r>
+            <a:r>
+              <a:rPr>
+                <a:solidFill>
+                  <a:srgbClr val="003B4F"/>
+                </a:solidFill>
+                <a:latin typeface="Courier"/>
+              </a:rPr>
+              <a:t> </a:t>
+            </a:r>
+            <a:r>
+              <a:rPr>
+                <a:solidFill>
+                  <a:srgbClr val="8F5902"/>
+                </a:solidFill>
+                <a:latin typeface="Courier"/>
+              </a:rPr>
+              <a:t>NA</a:t>
+            </a:r>
+            <a:r>
+              <a:rPr>
+                <a:solidFill>
+                  <a:srgbClr val="003B4F"/>
+                </a:solidFill>
+                <a:latin typeface="Courier"/>
+              </a:rPr>
+              <a:t>) </a:t>
+            </a:r>
+            <a:r>
+              <a:rPr>
+                <a:solidFill>
+                  <a:srgbClr val="5E5E5E"/>
+                </a:solidFill>
+                <a:latin typeface="Courier"/>
+              </a:rPr>
+              <a:t>+</a:t>
+            </a:r>
+            <a:br/>
+            <a:r>
+              <a:rPr>
+                <a:solidFill>
+                  <a:srgbClr val="003B4F"/>
+                </a:solidFill>
+                <a:latin typeface="Courier"/>
+              </a:rPr>
+              <a:t>  </a:t>
+            </a:r>
+            <a:r>
+              <a:rPr>
+                <a:solidFill>
+                  <a:srgbClr val="4758AB"/>
+                </a:solidFill>
+                <a:latin typeface="Courier"/>
+              </a:rPr>
+              <a:t>geom_jitter</a:t>
+            </a:r>
+            <a:r>
+              <a:rPr>
+                <a:solidFill>
+                  <a:srgbClr val="003B4F"/>
+                </a:solidFill>
+                <a:latin typeface="Courier"/>
+              </a:rPr>
+              <a:t>(</a:t>
+            </a:r>
+            <a:r>
+              <a:rPr>
+                <a:solidFill>
+                  <a:srgbClr val="4758AB"/>
+                </a:solidFill>
+                <a:latin typeface="Courier"/>
+              </a:rPr>
+              <a:t>aes</a:t>
+            </a:r>
+            <a:r>
+              <a:rPr>
+                <a:solidFill>
+                  <a:srgbClr val="003B4F"/>
+                </a:solidFill>
+                <a:latin typeface="Courier"/>
+              </a:rPr>
+              <a:t>(</a:t>
+            </a:r>
+            <a:r>
+              <a:rPr>
+                <a:solidFill>
+                  <a:srgbClr val="657422"/>
+                </a:solidFill>
+                <a:latin typeface="Courier"/>
+              </a:rPr>
+              <a:t>color =</a:t>
+            </a:r>
+            <a:r>
+              <a:rPr>
+                <a:solidFill>
+                  <a:srgbClr val="003B4F"/>
+                </a:solidFill>
+                <a:latin typeface="Courier"/>
+              </a:rPr>
+              <a:t> team), </a:t>
+            </a:r>
+            <a:r>
+              <a:rPr>
+                <a:solidFill>
+                  <a:srgbClr val="657422"/>
+                </a:solidFill>
+                <a:latin typeface="Courier"/>
+              </a:rPr>
+              <a:t>width =</a:t>
+            </a:r>
+            <a:r>
+              <a:rPr>
+                <a:solidFill>
+                  <a:srgbClr val="003B4F"/>
+                </a:solidFill>
+                <a:latin typeface="Courier"/>
+              </a:rPr>
+              <a:t> </a:t>
+            </a:r>
+            <a:r>
+              <a:rPr>
+                <a:solidFill>
+                  <a:srgbClr val="AD0000"/>
+                </a:solidFill>
+                <a:latin typeface="Courier"/>
+              </a:rPr>
+              <a:t>0.15</a:t>
+            </a:r>
+            <a:r>
+              <a:rPr>
+                <a:solidFill>
+                  <a:srgbClr val="003B4F"/>
+                </a:solidFill>
+                <a:latin typeface="Courier"/>
+              </a:rPr>
+              <a:t>, </a:t>
+            </a:r>
+            <a:r>
+              <a:rPr>
+                <a:solidFill>
+                  <a:srgbClr val="657422"/>
+                </a:solidFill>
+                <a:latin typeface="Courier"/>
+              </a:rPr>
+              <a:t>alpha =</a:t>
+            </a:r>
+            <a:r>
+              <a:rPr>
+                <a:solidFill>
+                  <a:srgbClr val="003B4F"/>
+                </a:solidFill>
+                <a:latin typeface="Courier"/>
+              </a:rPr>
+              <a:t> </a:t>
+            </a:r>
+            <a:r>
+              <a:rPr>
+                <a:solidFill>
+                  <a:srgbClr val="AD0000"/>
+                </a:solidFill>
+                <a:latin typeface="Courier"/>
+              </a:rPr>
+              <a:t>0.8</a:t>
+            </a:r>
+            <a:r>
+              <a:rPr>
+                <a:solidFill>
+                  <a:srgbClr val="003B4F"/>
+                </a:solidFill>
+                <a:latin typeface="Courier"/>
+              </a:rPr>
+              <a:t>) </a:t>
+            </a:r>
+            <a:r>
+              <a:rPr>
+                <a:solidFill>
+                  <a:srgbClr val="5E5E5E"/>
+                </a:solidFill>
+                <a:latin typeface="Courier"/>
+              </a:rPr>
+              <a:t>+</a:t>
+            </a:r>
+            <a:br/>
+            <a:r>
+              <a:rPr>
+                <a:solidFill>
+                  <a:srgbClr val="003B4F"/>
+                </a:solidFill>
+                <a:latin typeface="Courier"/>
+              </a:rPr>
+              <a:t>  </a:t>
+            </a:r>
+            <a:r>
+              <a:rPr>
+                <a:solidFill>
+                  <a:srgbClr val="4758AB"/>
+                </a:solidFill>
+                <a:latin typeface="Courier"/>
+              </a:rPr>
+              <a:t>labs</a:t>
+            </a:r>
+            <a:r>
+              <a:rPr>
+                <a:solidFill>
+                  <a:srgbClr val="003B4F"/>
+                </a:solidFill>
+                <a:latin typeface="Courier"/>
+              </a:rPr>
+              <a:t>(</a:t>
+            </a:r>
+            <a:r>
+              <a:rPr>
+                <a:solidFill>
+                  <a:srgbClr val="657422"/>
+                </a:solidFill>
+                <a:latin typeface="Courier"/>
+              </a:rPr>
+              <a:t>x =</a:t>
+            </a:r>
+            <a:r>
+              <a:rPr>
+                <a:solidFill>
+                  <a:srgbClr val="003B4F"/>
+                </a:solidFill>
+                <a:latin typeface="Courier"/>
+              </a:rPr>
+              <a:t> </a:t>
+            </a:r>
+            <a:r>
+              <a:rPr>
+                <a:solidFill>
+                  <a:srgbClr val="20794D"/>
+                </a:solidFill>
+                <a:latin typeface="Courier"/>
+              </a:rPr>
+              <a:t>"Sun exposure"</a:t>
+            </a:r>
+            <a:r>
+              <a:rPr>
+                <a:solidFill>
+                  <a:srgbClr val="003B4F"/>
+                </a:solidFill>
+                <a:latin typeface="Courier"/>
+              </a:rPr>
+              <a:t>, </a:t>
+            </a:r>
+            <a:r>
+              <a:rPr>
+                <a:solidFill>
+                  <a:srgbClr val="657422"/>
+                </a:solidFill>
+                <a:latin typeface="Courier"/>
+              </a:rPr>
+              <a:t>y =</a:t>
+            </a:r>
+            <a:r>
+              <a:rPr>
+                <a:solidFill>
+                  <a:srgbClr val="003B4F"/>
+                </a:solidFill>
+                <a:latin typeface="Courier"/>
+              </a:rPr>
+              <a:t> </a:t>
+            </a:r>
+            <a:r>
+              <a:rPr>
+                <a:solidFill>
+                  <a:srgbClr val="20794D"/>
+                </a:solidFill>
+                <a:latin typeface="Courier"/>
+              </a:rPr>
+              <a:t>"Needle length (mm)"</a:t>
+            </a:r>
+            <a:r>
+              <a:rPr>
+                <a:solidFill>
+                  <a:srgbClr val="003B4F"/>
+                </a:solidFill>
+                <a:latin typeface="Courier"/>
+              </a:rPr>
+              <a:t>, </a:t>
+            </a:r>
+            <a:r>
+              <a:rPr>
+                <a:solidFill>
+                  <a:srgbClr val="657422"/>
+                </a:solidFill>
+                <a:latin typeface="Courier"/>
+              </a:rPr>
+              <a:t>color =</a:t>
+            </a:r>
+            <a:r>
+              <a:rPr>
+                <a:solidFill>
+                  <a:srgbClr val="003B4F"/>
+                </a:solidFill>
+                <a:latin typeface="Courier"/>
+              </a:rPr>
+              <a:t> </a:t>
+            </a:r>
+            <a:r>
+              <a:rPr>
+                <a:solidFill>
+                  <a:srgbClr val="20794D"/>
+                </a:solidFill>
+                <a:latin typeface="Courier"/>
+              </a:rPr>
+              <a:t>"Team"</a:t>
+            </a:r>
+            <a:r>
+              <a:rPr>
+                <a:solidFill>
+                  <a:srgbClr val="003B4F"/>
+                </a:solidFill>
+                <a:latin typeface="Courier"/>
+              </a:rPr>
+              <a:t>)</a:t>
+            </a:r>
+          </a:p>
+        </p:txBody>
+      </p:sp>
+      <p:pic>
+        <p:nvPicPr>
+          <p:cNvPr descr="getting_started_lecture_files/figure-pptx/getting-started-06-1.png" id="0" name="Picture 1"/>
+          <p:cNvPicPr>
+            <a:picLocks noGrp="1" noChangeAspect="1"/>
+          </p:cNvPicPr>
+          <p:nvPr/>
+        </p:nvPicPr>
+        <p:blipFill>
+          <a:blip r:embed="rId2"/>
+          <a:stretch>
+            <a:fillRect/>
+          </a:stretch>
+        </p:blipFill>
+        <p:spPr bwMode="auto">
+          <a:xfrm>
+            <a:off x="127000" y="1397000"/>
+            <a:ext cx="4432300" cy="3048000"/>
+          </a:xfrm>
+          <a:prstGeom prst="rect">
+            <a:avLst/>
+          </a:prstGeom>
+          <a:noFill/>
+          <a:ln w="9525">
+            <a:noFill/>
+            <a:headEnd/>
+            <a:tailEnd/>
+          </a:ln>
+        </p:spPr>
+      </p:pic>
       <p:sp>
         <p:nvSpPr>
           <p:cNvPr id="4" name="Content Placeholder 3"/>
@@ -8849,12 +8736,55 @@
           <a:bodyPr/>
           <a:lstStyle/>
           <a:p>
+            <a:pPr lvl="0" indent="0" marL="0">
+              <a:buNone/>
+            </a:pPr>
+            <a:r>
+              <a:rPr/>
+              <a:t>Colour by </a:t>
+            </a:r>
+            <a:r>
+              <a:rPr>
+                <a:latin typeface="Courier"/>
+              </a:rPr>
+              <a:t>team</a:t>
+            </a:r>
+            <a:r>
+              <a:rPr/>
+              <a:t> and the problem jumps out: the four teams sit in </a:t>
+            </a:r>
+            <a:r>
+              <a:rPr b="1"/>
+              <a:t>different bands</a:t>
+            </a:r>
+            <a:r>
+              <a:rPr/>
+              <a:t>. A needle is not independent of the other seven from the same tree.</a:t>
+            </a:r>
+          </a:p>
+        </p:txBody>
+      </p:sp>
+      <p:sp>
+        <p:nvSpPr>
+          <p:cNvPr id="5" name="Text Placeholder 4"/>
+          <p:cNvSpPr>
+            <a:spLocks noGrp="1"/>
+          </p:cNvSpPr>
+          <p:nvPr>
+            <p:ph idx="3" sz="quarter" type="body"/>
+          </p:nvPr>
+        </p:nvSpPr>
+        <p:spPr/>
+        <p:txBody>
+          <a:bodyPr/>
+          <a:lstStyle/>
+          <a:p>
             <a:pPr lvl="0" indent="0" marL="1270000">
               <a:buNone/>
             </a:pPr>
             <a:r>
               <a:rPr sz="2000" b="1"/>
-              <a:t>Note</a:t>
+              <a:t>Important</a:t>
             </a:r>
           </a:p>
           <a:p>
@@ -8863,70 +8793,29 @@
             </a:pPr>
             <a:r>
               <a:rPr sz="2000" b="1"/>
-              <a:t>Up next — Wrangling Your Data</a:t>
-            </a:r>
-          </a:p>
-          <a:p>
-            <a:pPr lvl="0"/>
-            <a:r>
-              <a:rPr sz="2000">
-                <a:latin typeface="Courier"/>
-              </a:rPr>
-              <a:t>filter()</a:t>
-            </a:r>
+              <a:t>⚠️ Pseudoreplication</a:t>
+            </a:r>
+          </a:p>
+          <a:p>
+            <a:pPr lvl="0" indent="0" marL="1270000">
+              <a:buNone/>
+            </a:pPr>
             <a:r>
               <a:rPr sz="2000"/>
-              <a:t>, </a:t>
-            </a:r>
-            <a:r>
-              <a:rPr sz="2000">
-                <a:latin typeface="Courier"/>
-              </a:rPr>
-              <a:t>select()</a:t>
+              <a:t>We have </a:t>
+            </a:r>
+            <a:r>
+              <a:rPr sz="2000" b="1"/>
+              <a:t>n = 4 trees</a:t>
             </a:r>
             <a:r>
               <a:rPr sz="2000"/>
-              <a:t>, </a:t>
-            </a:r>
-            <a:r>
-              <a:rPr sz="2000">
-                <a:latin typeface="Courier"/>
-              </a:rPr>
-              <a:t>mutate()</a:t>
-            </a:r>
+              <a:t>, not n = 64 needles.</a:t>
+            </a:r>
+            <a:br/>
             <a:r>
               <a:rPr sz="2000"/>
-              <a:t>, </a:t>
-            </a:r>
-            <a:r>
-              <a:rPr sz="2000">
-                <a:latin typeface="Courier"/>
-              </a:rPr>
-              <a:t>arrange()</a:t>
-            </a:r>
-          </a:p>
-          <a:p>
-            <a:pPr lvl="0"/>
-            <a:r>
-              <a:rPr sz="2000"/>
-              <a:t>Cleaning a genuinely messy version of this dataset</a:t>
-            </a:r>
-          </a:p>
-          <a:p>
-            <a:pPr lvl="0"/>
-            <a:r>
-              <a:rPr sz="2000"/>
-              <a:t>The pipe </a:t>
-            </a:r>
-            <a:r>
-              <a:rPr sz="2000">
-                <a:latin typeface="Courier"/>
-              </a:rPr>
-              <a:t>|&gt;</a:t>
-            </a:r>
-            <a:r>
-              <a:rPr sz="2000"/>
-              <a:t> and building a pipeline</a:t>
+              <a:t>Counting needles inflates our confidence in a difference we have barely measured.</a:t>
             </a:r>
           </a:p>
         </p:txBody>
@@ -8966,7 +8855,432 @@
         <p:spPr>
           <a:xfrm>
             <a:off x="0" y="0"/>
-            <a:ext cx="9144000" cy="582780"/>
+            <a:ext cx="9144000" cy="602780"/>
+          </a:xfrm>
+          <a:solidFill>
+            <a:srgbClr val="70121D"/>
+          </a:solidFill>
+        </p:spPr>
+        <p:txBody>
+          <a:bodyPr/>
+          <a:lstStyle/>
+          <a:p>
+            <a:pPr lvl="0" indent="0" marL="0">
+              <a:buNone/>
+            </a:pPr>
+            <a:r>
+              <a:rPr/>
+              <a:t>Doing it the right way: </a:t>
+            </a:r>
+            <a:r>
+              <a:rPr>
+                <a:latin typeface="Courier"/>
+              </a:rPr>
+              <a:t>group_by()</a:t>
+            </a:r>
+            <a:r>
+              <a:rPr/>
+              <a:t> + </a:t>
+            </a:r>
+            <a:r>
+              <a:rPr>
+                <a:latin typeface="Courier"/>
+              </a:rPr>
+              <a:t>summarise()</a:t>
+            </a:r>
+          </a:p>
+        </p:txBody>
+      </p:sp>
+      <p:sp>
+        <p:nvSpPr>
+          <p:cNvPr id="3" name="Content Placeholder 2"/>
+          <p:cNvSpPr>
+            <a:spLocks noGrp="1"/>
+          </p:cNvSpPr>
+          <p:nvPr>
+            <p:ph idx="1" sz="half"/>
+          </p:nvPr>
+        </p:nvSpPr>
+        <p:spPr/>
+        <p:txBody>
+          <a:bodyPr/>
+          <a:lstStyle/>
+          <a:p>
+            <a:pPr lvl="0" indent="0" marL="0">
+              <a:buNone/>
+            </a:pPr>
+            <a:r>
+              <a:rPr/>
+              <a:t>Collapse each team-and-side down to </a:t>
+            </a:r>
+            <a:r>
+              <a:rPr b="1"/>
+              <a:t>one number</a:t>
+            </a:r>
+            <a:r>
+              <a:rPr/>
+              <a:t> — the thing we actually replicated:</a:t>
+            </a:r>
+          </a:p>
+          <a:p>
+            <a:pPr lvl="0" indent="0">
+              <a:buNone/>
+            </a:pPr>
+            <a:r>
+              <a:rPr>
+                <a:solidFill>
+                  <a:srgbClr val="003B4F"/>
+                </a:solidFill>
+                <a:latin typeface="Courier"/>
+              </a:rPr>
+              <a:t>team_means &lt;- pine_df </a:t>
+            </a:r>
+            <a:r>
+              <a:rPr>
+                <a:solidFill>
+                  <a:srgbClr val="5E5E5E"/>
+                </a:solidFill>
+                <a:latin typeface="Courier"/>
+              </a:rPr>
+              <a:t>|&gt;</a:t>
+            </a:r>
+            <a:br/>
+            <a:r>
+              <a:rPr>
+                <a:solidFill>
+                  <a:srgbClr val="003B4F"/>
+                </a:solidFill>
+                <a:latin typeface="Courier"/>
+              </a:rPr>
+              <a:t>  </a:t>
+            </a:r>
+            <a:r>
+              <a:rPr>
+                <a:solidFill>
+                  <a:srgbClr val="4758AB"/>
+                </a:solidFill>
+                <a:latin typeface="Courier"/>
+              </a:rPr>
+              <a:t>group_by</a:t>
+            </a:r>
+            <a:r>
+              <a:rPr>
+                <a:solidFill>
+                  <a:srgbClr val="003B4F"/>
+                </a:solidFill>
+                <a:latin typeface="Courier"/>
+              </a:rPr>
+              <a:t>(team, side) </a:t>
+            </a:r>
+            <a:r>
+              <a:rPr>
+                <a:solidFill>
+                  <a:srgbClr val="5E5E5E"/>
+                </a:solidFill>
+                <a:latin typeface="Courier"/>
+              </a:rPr>
+              <a:t>|&gt;</a:t>
+            </a:r>
+            <a:br/>
+            <a:r>
+              <a:rPr>
+                <a:solidFill>
+                  <a:srgbClr val="003B4F"/>
+                </a:solidFill>
+                <a:latin typeface="Courier"/>
+              </a:rPr>
+              <a:t>  </a:t>
+            </a:r>
+            <a:r>
+              <a:rPr>
+                <a:solidFill>
+                  <a:srgbClr val="4758AB"/>
+                </a:solidFill>
+                <a:latin typeface="Courier"/>
+              </a:rPr>
+              <a:t>summarise</a:t>
+            </a:r>
+            <a:r>
+              <a:rPr>
+                <a:solidFill>
+                  <a:srgbClr val="003B4F"/>
+                </a:solidFill>
+                <a:latin typeface="Courier"/>
+              </a:rPr>
+              <a:t>(</a:t>
+            </a:r>
+            <a:r>
+              <a:rPr>
+                <a:solidFill>
+                  <a:srgbClr val="657422"/>
+                </a:solidFill>
+                <a:latin typeface="Courier"/>
+              </a:rPr>
+              <a:t>mean_length_mm =</a:t>
+            </a:r>
+            <a:r>
+              <a:rPr>
+                <a:solidFill>
+                  <a:srgbClr val="003B4F"/>
+                </a:solidFill>
+                <a:latin typeface="Courier"/>
+              </a:rPr>
+              <a:t> </a:t>
+            </a:r>
+            <a:r>
+              <a:rPr>
+                <a:solidFill>
+                  <a:srgbClr val="4758AB"/>
+                </a:solidFill>
+                <a:latin typeface="Courier"/>
+              </a:rPr>
+              <a:t>mean</a:t>
+            </a:r>
+            <a:r>
+              <a:rPr>
+                <a:solidFill>
+                  <a:srgbClr val="003B4F"/>
+                </a:solidFill>
+                <a:latin typeface="Courier"/>
+              </a:rPr>
+              <a:t>(needle_length_mm),</a:t>
+            </a:r>
+            <a:br/>
+            <a:r>
+              <a:rPr>
+                <a:solidFill>
+                  <a:srgbClr val="003B4F"/>
+                </a:solidFill>
+                <a:latin typeface="Courier"/>
+              </a:rPr>
+              <a:t>            </a:t>
+            </a:r>
+            <a:r>
+              <a:rPr>
+                <a:solidFill>
+                  <a:srgbClr val="657422"/>
+                </a:solidFill>
+                <a:latin typeface="Courier"/>
+              </a:rPr>
+              <a:t>.groups =</a:t>
+            </a:r>
+            <a:r>
+              <a:rPr>
+                <a:solidFill>
+                  <a:srgbClr val="003B4F"/>
+                </a:solidFill>
+                <a:latin typeface="Courier"/>
+              </a:rPr>
+              <a:t> </a:t>
+            </a:r>
+            <a:r>
+              <a:rPr>
+                <a:solidFill>
+                  <a:srgbClr val="20794D"/>
+                </a:solidFill>
+                <a:latin typeface="Courier"/>
+              </a:rPr>
+              <a:t>"drop"</a:t>
+            </a:r>
+            <a:r>
+              <a:rPr>
+                <a:solidFill>
+                  <a:srgbClr val="003B4F"/>
+                </a:solidFill>
+                <a:latin typeface="Courier"/>
+              </a:rPr>
+              <a:t>)</a:t>
+            </a:r>
+            <a:br/>
+            <a:br/>
+            <a:r>
+              <a:rPr>
+                <a:solidFill>
+                  <a:srgbClr val="003B4F"/>
+                </a:solidFill>
+                <a:latin typeface="Courier"/>
+              </a:rPr>
+              <a:t>team_means</a:t>
+            </a:r>
+          </a:p>
+          <a:p>
+            <a:pPr lvl="0" indent="0">
+              <a:buNone/>
+            </a:pPr>
+            <a:r>
+              <a:rPr>
+                <a:latin typeface="Courier"/>
+              </a:rPr>
+              <a:t># A tibble: 8 × 3
+  team       side  mean_length_mm
+  &lt;chr&gt;      &lt;chr&gt;          &lt;dbl&gt;
+1 botany     shady           16.1
+2 botany     sunny           17.3
+3 grace_jace shady           15.4
+4 grace_jace sunny           15.5
+5 one        shady           13.2
+6 one        sunny           14.2
+7 waterbugs  shady           11.7
+8 waterbugs  sunny           13.8</a:t>
+            </a:r>
+          </a:p>
+          <a:p>
+            <a:pPr lvl="0" indent="0" marL="0">
+              <a:buNone/>
+            </a:pPr>
+            <a:r>
+              <a:rPr/>
+              <a:t>64 rows became </a:t>
+            </a:r>
+            <a:r>
+              <a:rPr b="1"/>
+              <a:t>8</a:t>
+            </a:r>
+            <a:r>
+              <a:rPr/>
+              <a:t> — four teams × two sides. </a:t>
+            </a:r>
+            <a:r>
+              <a:rPr i="1"/>
+              <a:t>This</a:t>
+            </a:r>
+            <a:r>
+              <a:rPr/>
+              <a:t> is the dataset our question is really about.</a:t>
+            </a:r>
+          </a:p>
+        </p:txBody>
+      </p:sp>
+      <p:sp>
+        <p:nvSpPr>
+          <p:cNvPr id="4" name="Content Placeholder 3"/>
+          <p:cNvSpPr>
+            <a:spLocks noGrp="1"/>
+          </p:cNvSpPr>
+          <p:nvPr>
+            <p:ph idx="2" sz="half"/>
+          </p:nvPr>
+        </p:nvSpPr>
+        <p:spPr/>
+        <p:txBody>
+          <a:bodyPr/>
+          <a:lstStyle/>
+          <a:p>
+            <a:pPr lvl="0" indent="0" marL="1270000">
+              <a:buNone/>
+            </a:pPr>
+            <a:r>
+              <a:rPr sz="2000" b="1"/>
+              <a:t>Note</a:t>
+            </a:r>
+          </a:p>
+          <a:p>
+            <a:pPr lvl="0" indent="0" marL="1270000">
+              <a:buNone/>
+            </a:pPr>
+            <a:r>
+              <a:rPr sz="2000" b="1"/>
+              <a:t>📖 New words</a:t>
+            </a:r>
+          </a:p>
+          <a:p>
+            <a:pPr lvl="0"/>
+            <a:r>
+              <a:rPr sz="2000" b="1">
+                <a:latin typeface="Courier"/>
+              </a:rPr>
+              <a:t>group_by()</a:t>
+            </a:r>
+            <a:r>
+              <a:rPr sz="2000"/>
+              <a:t> — split the data into groups</a:t>
+            </a:r>
+          </a:p>
+          <a:p>
+            <a:pPr lvl="0"/>
+            <a:r>
+              <a:rPr sz="2000" b="1">
+                <a:latin typeface="Courier"/>
+              </a:rPr>
+              <a:t>summarise()</a:t>
+            </a:r>
+            <a:r>
+              <a:rPr sz="2000"/>
+              <a:t> — collapse each group to one row</a:t>
+            </a:r>
+          </a:p>
+          <a:p>
+            <a:pPr lvl="0"/>
+            <a:r>
+              <a:rPr sz="2000" b="1"/>
+              <a:t>Pipe </a:t>
+            </a:r>
+            <a:r>
+              <a:rPr sz="2000" b="1">
+                <a:latin typeface="Courier"/>
+              </a:rPr>
+              <a:t>|&gt;</a:t>
+            </a:r>
+            <a:r>
+              <a:rPr sz="2000"/>
+              <a:t> — send the result of one step into the next</a:t>
+            </a:r>
+          </a:p>
+          <a:p>
+            <a:pPr lvl="0" indent="0" marL="1270000">
+              <a:buNone/>
+            </a:pPr>
+            <a:r>
+              <a:rPr sz="2000"/>
+              <a:t>We’ll go deep on all three in </a:t>
+            </a:r>
+            <a:r>
+              <a:rPr sz="2000" b="1"/>
+              <a:t>Wrangling Your Data</a:t>
+            </a:r>
+            <a:r>
+              <a:rPr sz="2000"/>
+              <a:t>.</a:t>
+            </a:r>
+          </a:p>
+        </p:txBody>
+      </p:sp>
+    </p:spTree>
+  </p:cSld>
+</p:sld>
+</file>
+
+<file path=ppt/slides/slide27.xml><?xml version="1.0" encoding="utf-8"?>
+<p:sld xmlns:a="http://schemas.openxmlformats.org/drawingml/2006/main" xmlns:r="http://schemas.openxmlformats.org/officeDocument/2006/relationships" xmlns:p="http://schemas.openxmlformats.org/presentationml/2006/main">
+  <p:cSld>
+    <p:spTree>
+      <p:nvGrpSpPr>
+        <p:cNvPr id="1" name=""/>
+        <p:cNvGrpSpPr/>
+        <p:nvPr/>
+      </p:nvGrpSpPr>
+      <p:grpSpPr>
+        <a:xfrm>
+          <a:off x="0" y="0"/>
+          <a:ext cx="0" cy="0"/>
+          <a:chOff x="0" y="0"/>
+          <a:chExt cx="0" cy="0"/>
+        </a:xfrm>
+      </p:grpSpPr>
+      <p:sp>
+        <p:nvSpPr>
+          <p:cNvPr id="2" name="Title 1"/>
+          <p:cNvSpPr>
+            <a:spLocks noGrp="1"/>
+          </p:cNvSpPr>
+          <p:nvPr>
+            <p:ph type="title"/>
+          </p:nvPr>
+        </p:nvSpPr>
+        <p:spPr>
+          <a:xfrm>
+            <a:off x="139485" y="78119"/>
+            <a:ext cx="8229600" cy="607682"/>
           </a:xfrm>
         </p:spPr>
         <p:txBody>
@@ -8978,19 +9292,19 @@
             </a:pPr>
             <a:r>
               <a:rPr/>
-              <a:t>Getting unstuck</a:t>
-            </a:r>
-          </a:p>
-        </p:txBody>
-      </p:sp>
-      <p:sp>
-        <p:nvSpPr>
-          <p:cNvPr id="3" name="Content Placeholder 2"/>
-          <p:cNvSpPr>
-            <a:spLocks noGrp="1"/>
-          </p:cNvSpPr>
-          <p:nvPr>
-            <p:ph idx="1"/>
+              <a:t>The two pictures side by side</a:t>
+            </a:r>
+          </a:p>
+        </p:txBody>
+      </p:sp>
+      <p:sp>
+        <p:nvSpPr>
+          <p:cNvPr id="3" name="Text Placeholder 2"/>
+          <p:cNvSpPr>
+            <a:spLocks noGrp="1"/>
+          </p:cNvSpPr>
+          <p:nvPr>
+            <p:ph idx="1" type="body"/>
           </p:nvPr>
         </p:nvSpPr>
         <p:spPr/>
@@ -8998,110 +9312,550 @@
           <a:bodyPr/>
           <a:lstStyle/>
           <a:p>
+            <a:pPr lvl="0" indent="0">
+              <a:buNone/>
+            </a:pPr>
+            <a:r>
+              <a:rPr>
+                <a:solidFill>
+                  <a:srgbClr val="4758AB"/>
+                </a:solidFill>
+                <a:latin typeface="Courier"/>
+              </a:rPr>
+              <a:t>ggplot</a:t>
+            </a:r>
+            <a:r>
+              <a:rPr>
+                <a:solidFill>
+                  <a:srgbClr val="003B4F"/>
+                </a:solidFill>
+                <a:latin typeface="Courier"/>
+              </a:rPr>
+              <a:t>(team_means, </a:t>
+            </a:r>
+            <a:r>
+              <a:rPr>
+                <a:solidFill>
+                  <a:srgbClr val="4758AB"/>
+                </a:solidFill>
+                <a:latin typeface="Courier"/>
+              </a:rPr>
+              <a:t>aes</a:t>
+            </a:r>
+            <a:r>
+              <a:rPr>
+                <a:solidFill>
+                  <a:srgbClr val="003B4F"/>
+                </a:solidFill>
+                <a:latin typeface="Courier"/>
+              </a:rPr>
+              <a:t>(</a:t>
+            </a:r>
+            <a:r>
+              <a:rPr>
+                <a:solidFill>
+                  <a:srgbClr val="657422"/>
+                </a:solidFill>
+                <a:latin typeface="Courier"/>
+              </a:rPr>
+              <a:t>x =</a:t>
+            </a:r>
+            <a:r>
+              <a:rPr>
+                <a:solidFill>
+                  <a:srgbClr val="003B4F"/>
+                </a:solidFill>
+                <a:latin typeface="Courier"/>
+              </a:rPr>
+              <a:t> side, </a:t>
+            </a:r>
+            <a:r>
+              <a:rPr>
+                <a:solidFill>
+                  <a:srgbClr val="657422"/>
+                </a:solidFill>
+                <a:latin typeface="Courier"/>
+              </a:rPr>
+              <a:t>y =</a:t>
+            </a:r>
+            <a:r>
+              <a:rPr>
+                <a:solidFill>
+                  <a:srgbClr val="003B4F"/>
+                </a:solidFill>
+                <a:latin typeface="Courier"/>
+              </a:rPr>
+              <a:t> mean_length_mm, </a:t>
+            </a:r>
+            <a:r>
+              <a:rPr>
+                <a:solidFill>
+                  <a:srgbClr val="657422"/>
+                </a:solidFill>
+                <a:latin typeface="Courier"/>
+              </a:rPr>
+              <a:t>group =</a:t>
+            </a:r>
+            <a:r>
+              <a:rPr>
+                <a:solidFill>
+                  <a:srgbClr val="003B4F"/>
+                </a:solidFill>
+                <a:latin typeface="Courier"/>
+              </a:rPr>
+              <a:t> team)) </a:t>
+            </a:r>
+            <a:r>
+              <a:rPr>
+                <a:solidFill>
+                  <a:srgbClr val="5E5E5E"/>
+                </a:solidFill>
+                <a:latin typeface="Courier"/>
+              </a:rPr>
+              <a:t>+</a:t>
+            </a:r>
+            <a:br/>
+            <a:r>
+              <a:rPr>
+                <a:solidFill>
+                  <a:srgbClr val="003B4F"/>
+                </a:solidFill>
+                <a:latin typeface="Courier"/>
+              </a:rPr>
+              <a:t>  </a:t>
+            </a:r>
+            <a:r>
+              <a:rPr>
+                <a:solidFill>
+                  <a:srgbClr val="4758AB"/>
+                </a:solidFill>
+                <a:latin typeface="Courier"/>
+              </a:rPr>
+              <a:t>geom_line</a:t>
+            </a:r>
+            <a:r>
+              <a:rPr>
+                <a:solidFill>
+                  <a:srgbClr val="003B4F"/>
+                </a:solidFill>
+                <a:latin typeface="Courier"/>
+              </a:rPr>
+              <a:t>(</a:t>
+            </a:r>
+            <a:r>
+              <a:rPr>
+                <a:solidFill>
+                  <a:srgbClr val="4758AB"/>
+                </a:solidFill>
+                <a:latin typeface="Courier"/>
+              </a:rPr>
+              <a:t>aes</a:t>
+            </a:r>
+            <a:r>
+              <a:rPr>
+                <a:solidFill>
+                  <a:srgbClr val="003B4F"/>
+                </a:solidFill>
+                <a:latin typeface="Courier"/>
+              </a:rPr>
+              <a:t>(</a:t>
+            </a:r>
+            <a:r>
+              <a:rPr>
+                <a:solidFill>
+                  <a:srgbClr val="657422"/>
+                </a:solidFill>
+                <a:latin typeface="Courier"/>
+              </a:rPr>
+              <a:t>color =</a:t>
+            </a:r>
+            <a:r>
+              <a:rPr>
+                <a:solidFill>
+                  <a:srgbClr val="003B4F"/>
+                </a:solidFill>
+                <a:latin typeface="Courier"/>
+              </a:rPr>
+              <a:t> team), </a:t>
+            </a:r>
+            <a:r>
+              <a:rPr>
+                <a:solidFill>
+                  <a:srgbClr val="657422"/>
+                </a:solidFill>
+                <a:latin typeface="Courier"/>
+              </a:rPr>
+              <a:t>linewidth =</a:t>
+            </a:r>
+            <a:r>
+              <a:rPr>
+                <a:solidFill>
+                  <a:srgbClr val="003B4F"/>
+                </a:solidFill>
+                <a:latin typeface="Courier"/>
+              </a:rPr>
+              <a:t> </a:t>
+            </a:r>
+            <a:r>
+              <a:rPr>
+                <a:solidFill>
+                  <a:srgbClr val="AD0000"/>
+                </a:solidFill>
+                <a:latin typeface="Courier"/>
+              </a:rPr>
+              <a:t>0.8</a:t>
+            </a:r>
+            <a:r>
+              <a:rPr>
+                <a:solidFill>
+                  <a:srgbClr val="003B4F"/>
+                </a:solidFill>
+                <a:latin typeface="Courier"/>
+              </a:rPr>
+              <a:t>) </a:t>
+            </a:r>
+            <a:r>
+              <a:rPr>
+                <a:solidFill>
+                  <a:srgbClr val="5E5E5E"/>
+                </a:solidFill>
+                <a:latin typeface="Courier"/>
+              </a:rPr>
+              <a:t>+</a:t>
+            </a:r>
+            <a:br/>
+            <a:r>
+              <a:rPr>
+                <a:solidFill>
+                  <a:srgbClr val="003B4F"/>
+                </a:solidFill>
+                <a:latin typeface="Courier"/>
+              </a:rPr>
+              <a:t>  </a:t>
+            </a:r>
+            <a:r>
+              <a:rPr>
+                <a:solidFill>
+                  <a:srgbClr val="4758AB"/>
+                </a:solidFill>
+                <a:latin typeface="Courier"/>
+              </a:rPr>
+              <a:t>geom_point</a:t>
+            </a:r>
+            <a:r>
+              <a:rPr>
+                <a:solidFill>
+                  <a:srgbClr val="003B4F"/>
+                </a:solidFill>
+                <a:latin typeface="Courier"/>
+              </a:rPr>
+              <a:t>(</a:t>
+            </a:r>
+            <a:r>
+              <a:rPr>
+                <a:solidFill>
+                  <a:srgbClr val="4758AB"/>
+                </a:solidFill>
+                <a:latin typeface="Courier"/>
+              </a:rPr>
+              <a:t>aes</a:t>
+            </a:r>
+            <a:r>
+              <a:rPr>
+                <a:solidFill>
+                  <a:srgbClr val="003B4F"/>
+                </a:solidFill>
+                <a:latin typeface="Courier"/>
+              </a:rPr>
+              <a:t>(</a:t>
+            </a:r>
+            <a:r>
+              <a:rPr>
+                <a:solidFill>
+                  <a:srgbClr val="657422"/>
+                </a:solidFill>
+                <a:latin typeface="Courier"/>
+              </a:rPr>
+              <a:t>color =</a:t>
+            </a:r>
+            <a:r>
+              <a:rPr>
+                <a:solidFill>
+                  <a:srgbClr val="003B4F"/>
+                </a:solidFill>
+                <a:latin typeface="Courier"/>
+              </a:rPr>
+              <a:t> team), </a:t>
+            </a:r>
+            <a:r>
+              <a:rPr>
+                <a:solidFill>
+                  <a:srgbClr val="657422"/>
+                </a:solidFill>
+                <a:latin typeface="Courier"/>
+              </a:rPr>
+              <a:t>size =</a:t>
+            </a:r>
+            <a:r>
+              <a:rPr>
+                <a:solidFill>
+                  <a:srgbClr val="003B4F"/>
+                </a:solidFill>
+                <a:latin typeface="Courier"/>
+              </a:rPr>
+              <a:t> </a:t>
+            </a:r>
+            <a:r>
+              <a:rPr>
+                <a:solidFill>
+                  <a:srgbClr val="AD0000"/>
+                </a:solidFill>
+                <a:latin typeface="Courier"/>
+              </a:rPr>
+              <a:t>2</a:t>
+            </a:r>
+            <a:r>
+              <a:rPr>
+                <a:solidFill>
+                  <a:srgbClr val="003B4F"/>
+                </a:solidFill>
+                <a:latin typeface="Courier"/>
+              </a:rPr>
+              <a:t>) </a:t>
+            </a:r>
+            <a:r>
+              <a:rPr>
+                <a:solidFill>
+                  <a:srgbClr val="5E5E5E"/>
+                </a:solidFill>
+                <a:latin typeface="Courier"/>
+              </a:rPr>
+              <a:t>+</a:t>
+            </a:r>
+            <a:br/>
+            <a:r>
+              <a:rPr>
+                <a:solidFill>
+                  <a:srgbClr val="003B4F"/>
+                </a:solidFill>
+                <a:latin typeface="Courier"/>
+              </a:rPr>
+              <a:t>  </a:t>
+            </a:r>
+            <a:r>
+              <a:rPr>
+                <a:solidFill>
+                  <a:srgbClr val="4758AB"/>
+                </a:solidFill>
+                <a:latin typeface="Courier"/>
+              </a:rPr>
+              <a:t>labs</a:t>
+            </a:r>
+            <a:r>
+              <a:rPr>
+                <a:solidFill>
+                  <a:srgbClr val="003B4F"/>
+                </a:solidFill>
+                <a:latin typeface="Courier"/>
+              </a:rPr>
+              <a:t>(</a:t>
+            </a:r>
+            <a:r>
+              <a:rPr>
+                <a:solidFill>
+                  <a:srgbClr val="657422"/>
+                </a:solidFill>
+                <a:latin typeface="Courier"/>
+              </a:rPr>
+              <a:t>x =</a:t>
+            </a:r>
+            <a:r>
+              <a:rPr>
+                <a:solidFill>
+                  <a:srgbClr val="003B4F"/>
+                </a:solidFill>
+                <a:latin typeface="Courier"/>
+              </a:rPr>
+              <a:t> </a:t>
+            </a:r>
+            <a:r>
+              <a:rPr>
+                <a:solidFill>
+                  <a:srgbClr val="20794D"/>
+                </a:solidFill>
+                <a:latin typeface="Courier"/>
+              </a:rPr>
+              <a:t>"Sun exposure"</a:t>
+            </a:r>
+            <a:r>
+              <a:rPr>
+                <a:solidFill>
+                  <a:srgbClr val="003B4F"/>
+                </a:solidFill>
+                <a:latin typeface="Courier"/>
+              </a:rPr>
+              <a:t>, </a:t>
+            </a:r>
+            <a:r>
+              <a:rPr>
+                <a:solidFill>
+                  <a:srgbClr val="657422"/>
+                </a:solidFill>
+                <a:latin typeface="Courier"/>
+              </a:rPr>
+              <a:t>y =</a:t>
+            </a:r>
+            <a:r>
+              <a:rPr>
+                <a:solidFill>
+                  <a:srgbClr val="003B4F"/>
+                </a:solidFill>
+                <a:latin typeface="Courier"/>
+              </a:rPr>
+              <a:t> </a:t>
+            </a:r>
+            <a:r>
+              <a:rPr>
+                <a:solidFill>
+                  <a:srgbClr val="20794D"/>
+                </a:solidFill>
+                <a:latin typeface="Courier"/>
+              </a:rPr>
+              <a:t>"Mean needle length (mm)"</a:t>
+            </a:r>
+            <a:r>
+              <a:rPr>
+                <a:solidFill>
+                  <a:srgbClr val="003B4F"/>
+                </a:solidFill>
+                <a:latin typeface="Courier"/>
+              </a:rPr>
+              <a:t>, </a:t>
+            </a:r>
+            <a:r>
+              <a:rPr>
+                <a:solidFill>
+                  <a:srgbClr val="657422"/>
+                </a:solidFill>
+                <a:latin typeface="Courier"/>
+              </a:rPr>
+              <a:t>color =</a:t>
+            </a:r>
+            <a:r>
+              <a:rPr>
+                <a:solidFill>
+                  <a:srgbClr val="003B4F"/>
+                </a:solidFill>
+                <a:latin typeface="Courier"/>
+              </a:rPr>
+              <a:t> </a:t>
+            </a:r>
+            <a:r>
+              <a:rPr>
+                <a:solidFill>
+                  <a:srgbClr val="20794D"/>
+                </a:solidFill>
+                <a:latin typeface="Courier"/>
+              </a:rPr>
+              <a:t>"Team"</a:t>
+            </a:r>
+            <a:r>
+              <a:rPr>
+                <a:solidFill>
+                  <a:srgbClr val="003B4F"/>
+                </a:solidFill>
+                <a:latin typeface="Courier"/>
+              </a:rPr>
+              <a:t>)</a:t>
+            </a:r>
+          </a:p>
+        </p:txBody>
+      </p:sp>
+      <p:pic>
+        <p:nvPicPr>
+          <p:cNvPr descr="getting_started_lecture_files/figure-pptx/getting-started-08-1.png" id="0" name="Picture 1"/>
+          <p:cNvPicPr>
+            <a:picLocks noGrp="1" noChangeAspect="1"/>
+          </p:cNvPicPr>
+          <p:nvPr/>
+        </p:nvPicPr>
+        <p:blipFill>
+          <a:blip r:embed="rId2"/>
+          <a:stretch>
+            <a:fillRect/>
+          </a:stretch>
+        </p:blipFill>
+        <p:spPr bwMode="auto">
+          <a:xfrm>
+            <a:off x="127000" y="1358900"/>
+            <a:ext cx="4432300" cy="3124200"/>
+          </a:xfrm>
+          <a:prstGeom prst="rect">
+            <a:avLst/>
+          </a:prstGeom>
+          <a:noFill/>
+          <a:ln w="9525">
+            <a:noFill/>
+            <a:headEnd/>
+            <a:tailEnd/>
+          </a:ln>
+        </p:spPr>
+      </p:pic>
+      <p:sp>
+        <p:nvSpPr>
+          <p:cNvPr id="4" name="Content Placeholder 3"/>
+          <p:cNvSpPr>
+            <a:spLocks noGrp="1"/>
+          </p:cNvSpPr>
+          <p:nvPr>
+            <p:ph idx="2" sz="half"/>
+          </p:nvPr>
+        </p:nvSpPr>
+        <p:spPr/>
+        <p:txBody>
+          <a:bodyPr/>
+          <a:lstStyle/>
+          <a:p>
             <a:pPr lvl="0" indent="0" marL="0">
               <a:buNone/>
             </a:pPr>
             <a:r>
               <a:rPr/>
-              <a:t>When code breaks — and it will, that is normal:</a:t>
-            </a:r>
-          </a:p>
-          <a:p>
-            <a:pPr lvl="0" indent="-342900" marL="342900">
-              <a:buAutoNum type="arabicPeriod"/>
-            </a:pPr>
-            <a:r>
-              <a:rPr/>
-              <a:t>Read the </a:t>
+              <a:t>Each line is </a:t>
             </a:r>
             <a:r>
               <a:rPr b="1"/>
-              <a:t>error message</a:t>
-            </a:r>
-            <a:r>
-              <a:rPr/>
-              <a:t> out loud; it usually names the line</a:t>
-            </a:r>
-          </a:p>
-          <a:p>
-            <a:pPr lvl="0" indent="-342900" marL="342900">
-              <a:buAutoNum type="arabicPeriod"/>
-            </a:pPr>
-            <a:r>
-              <a:rPr/>
-              <a:t>Check the usual suspects: </a:t>
-            </a:r>
-            <a:r>
-              <a:rPr>
-                <a:latin typeface="Courier"/>
-              </a:rPr>
-              <a:t>library(tidyverse)</a:t>
-            </a:r>
-            <a:r>
-              <a:rPr/>
-              <a:t> loaded? Spelling? A missing </a:t>
-            </a:r>
-            <a:r>
-              <a:rPr>
-                <a:latin typeface="Courier"/>
-              </a:rPr>
-              <a:t>)</a:t>
-            </a:r>
-            <a:r>
-              <a:rPr/>
-              <a:t> or </a:t>
-            </a:r>
-            <a:r>
-              <a:rPr>
-                <a:latin typeface="Courier"/>
-              </a:rPr>
-              <a:t>+</a:t>
-            </a:r>
-            <a:r>
-              <a:rPr/>
-              <a:t> at the </a:t>
-            </a:r>
-            <a:r>
-              <a:rPr i="1"/>
-              <a:t>start</a:t>
-            </a:r>
-            <a:r>
-              <a:rPr/>
-              <a:t> of a line?</a:t>
-            </a:r>
-          </a:p>
-          <a:p>
-            <a:pPr lvl="0" indent="-342900" marL="342900">
-              <a:buAutoNum type="arabicPeriod"/>
-            </a:pPr>
-            <a:r>
-              <a:rPr>
-                <a:latin typeface="Courier"/>
-              </a:rPr>
-              <a:t>?function_name</a:t>
-            </a:r>
-            <a:r>
-              <a:rPr/>
-              <a:t> opens the help page</a:t>
-            </a:r>
-          </a:p>
-          <a:p>
-            <a:pPr lvl="0" indent="-342900" marL="342900">
-              <a:buAutoNum type="arabicPeriod"/>
-            </a:pPr>
-            <a:r>
-              <a:rPr/>
-              <a:t>Bring the </a:t>
+              <a:t>one tree</a:t>
+            </a:r>
+            <a:r>
+              <a:rPr/>
+              <a:t>. The teams are far apart vertically — but </a:t>
             </a:r>
             <a:r>
               <a:rPr b="1"/>
-              <a:t>exact error</a:t>
-            </a:r>
-            <a:r>
-              <a:rPr/>
-              <a:t> (copy-paste it) to class or office hours</a:t>
-            </a:r>
-          </a:p>
+              <a:t>every single line slopes the same way</a:t>
+            </a:r>
+            <a:r>
+              <a:rPr/>
+              <a:t>.</a:t>
+            </a:r>
+          </a:p>
+        </p:txBody>
+      </p:sp>
+      <p:sp>
+        <p:nvSpPr>
+          <p:cNvPr id="5" name="Text Placeholder 4"/>
+          <p:cNvSpPr>
+            <a:spLocks noGrp="1"/>
+          </p:cNvSpPr>
+          <p:nvPr>
+            <p:ph idx="3" sz="quarter" type="body"/>
+          </p:nvPr>
+        </p:nvSpPr>
+        <p:spPr/>
+        <p:txBody>
+          <a:bodyPr/>
+          <a:lstStyle/>
           <a:p>
             <a:pPr lvl="0" indent="0" marL="1270000">
               <a:buNone/>
@@ -9126,7 +9880,1153 @@
             </a:pPr>
             <a:r>
               <a:rPr sz="2000"/>
-              <a:t>Every working scientist googles error messages daily. Getting stuck is not failing — it is the job.</a:t>
+              <a:t>Because both sides come from the same tree, these are </a:t>
+            </a:r>
+            <a:r>
+              <a:rPr sz="2000" b="1"/>
+              <a:t>paired</a:t>
+            </a:r>
+            <a:r>
+              <a:rPr sz="2000"/>
+              <a:t> measurements. Comparing each tree </a:t>
+            </a:r>
+            <a:r>
+              <a:rPr sz="2000" i="1"/>
+              <a:t>to itself</a:t>
+            </a:r>
+            <a:r>
+              <a:rPr sz="2000"/>
+              <a:t> cancels out the big between-team differences.</a:t>
+            </a:r>
+          </a:p>
+          <a:p>
+            <a:pPr lvl="0" indent="0" marL="1270000">
+              <a:buNone/>
+            </a:pPr>
+            <a:r>
+              <a:rPr sz="2000" b="1"/>
+              <a:t>Tip</a:t>
+            </a:r>
+          </a:p>
+          <a:p>
+            <a:pPr lvl="0" indent="0" marL="1270000">
+              <a:buNone/>
+            </a:pPr>
+            <a:r>
+              <a:rPr sz="2000" b="1"/>
+              <a:t>🖐 Coming in Week 4</a:t>
+            </a:r>
+          </a:p>
+          <a:p>
+            <a:pPr lvl="0" indent="0" marL="1270000">
+              <a:buNone/>
+            </a:pPr>
+            <a:r>
+              <a:rPr sz="2000"/>
+              <a:t>We’ll put numbers on this — and see how a </a:t>
+            </a:r>
+            <a:r>
+              <a:rPr sz="2000" b="1"/>
+              <a:t>paired t-test</a:t>
+            </a:r>
+            <a:r>
+              <a:rPr sz="2000"/>
+              <a:t> finds a signal that the naive test on 64 needles misses.</a:t>
+            </a:r>
+          </a:p>
+        </p:txBody>
+      </p:sp>
+    </p:spTree>
+  </p:cSld>
+</p:sld>
+</file>
+
+<file path=ppt/slides/slide28.xml><?xml version="1.0" encoding="utf-8"?>
+<p:sld xmlns:a="http://schemas.openxmlformats.org/drawingml/2006/main" xmlns:r="http://schemas.openxmlformats.org/officeDocument/2006/relationships" xmlns:p="http://schemas.openxmlformats.org/presentationml/2006/main">
+  <p:cSld>
+    <p:spTree>
+      <p:nvGrpSpPr>
+        <p:cNvPr id="1" name=""/>
+        <p:cNvGrpSpPr/>
+        <p:nvPr/>
+      </p:nvGrpSpPr>
+      <p:grpSpPr>
+        <a:xfrm>
+          <a:off x="0" y="0"/>
+          <a:ext cx="0" cy="0"/>
+          <a:chOff x="0" y="0"/>
+          <a:chExt cx="0" cy="0"/>
+        </a:xfrm>
+      </p:grpSpPr>
+      <p:sp>
+        <p:nvSpPr>
+          <p:cNvPr id="2" name="Title 1"/>
+          <p:cNvSpPr>
+            <a:spLocks noGrp="1"/>
+          </p:cNvSpPr>
+          <p:nvPr>
+            <p:ph type="title"/>
+          </p:nvPr>
+        </p:nvSpPr>
+        <p:spPr>
+          <a:xfrm>
+            <a:off x="0" y="0"/>
+            <a:ext cx="9144000" cy="602780"/>
+          </a:xfrm>
+          <a:solidFill>
+            <a:srgbClr val="70121D"/>
+          </a:solidFill>
+        </p:spPr>
+        <p:txBody>
+          <a:bodyPr/>
+          <a:lstStyle/>
+          <a:p>
+            <a:pPr lvl="0" indent="0" marL="0">
+              <a:buNone/>
+            </a:pPr>
+            <a:r>
+              <a:rPr/>
+              <a:t>Save your plot</a:t>
+            </a:r>
+          </a:p>
+        </p:txBody>
+      </p:sp>
+      <p:sp>
+        <p:nvSpPr>
+          <p:cNvPr id="3" name="Content Placeholder 2"/>
+          <p:cNvSpPr>
+            <a:spLocks noGrp="1"/>
+          </p:cNvSpPr>
+          <p:nvPr>
+            <p:ph idx="1" sz="half"/>
+          </p:nvPr>
+        </p:nvSpPr>
+        <p:spPr/>
+        <p:txBody>
+          <a:bodyPr/>
+          <a:lstStyle/>
+          <a:p>
+            <a:pPr lvl="0" indent="0">
+              <a:buNone/>
+            </a:pPr>
+            <a:r>
+              <a:rPr>
+                <a:solidFill>
+                  <a:srgbClr val="003B4F"/>
+                </a:solidFill>
+                <a:latin typeface="Courier"/>
+              </a:rPr>
+              <a:t>needle_plot &lt;- </a:t>
+            </a:r>
+            <a:r>
+              <a:rPr>
+                <a:solidFill>
+                  <a:srgbClr val="4758AB"/>
+                </a:solidFill>
+                <a:latin typeface="Courier"/>
+              </a:rPr>
+              <a:t>ggplot</a:t>
+            </a:r>
+            <a:r>
+              <a:rPr>
+                <a:solidFill>
+                  <a:srgbClr val="003B4F"/>
+                </a:solidFill>
+                <a:latin typeface="Courier"/>
+              </a:rPr>
+              <a:t>(pine_df, </a:t>
+            </a:r>
+            <a:r>
+              <a:rPr>
+                <a:solidFill>
+                  <a:srgbClr val="4758AB"/>
+                </a:solidFill>
+                <a:latin typeface="Courier"/>
+              </a:rPr>
+              <a:t>aes</a:t>
+            </a:r>
+            <a:r>
+              <a:rPr>
+                <a:solidFill>
+                  <a:srgbClr val="003B4F"/>
+                </a:solidFill>
+                <a:latin typeface="Courier"/>
+              </a:rPr>
+              <a:t>(</a:t>
+            </a:r>
+            <a:r>
+              <a:rPr>
+                <a:solidFill>
+                  <a:srgbClr val="657422"/>
+                </a:solidFill>
+                <a:latin typeface="Courier"/>
+              </a:rPr>
+              <a:t>x =</a:t>
+            </a:r>
+            <a:r>
+              <a:rPr>
+                <a:solidFill>
+                  <a:srgbClr val="003B4F"/>
+                </a:solidFill>
+                <a:latin typeface="Courier"/>
+              </a:rPr>
+              <a:t> side, </a:t>
+            </a:r>
+            <a:r>
+              <a:rPr>
+                <a:solidFill>
+                  <a:srgbClr val="657422"/>
+                </a:solidFill>
+                <a:latin typeface="Courier"/>
+              </a:rPr>
+              <a:t>y =</a:t>
+            </a:r>
+            <a:r>
+              <a:rPr>
+                <a:solidFill>
+                  <a:srgbClr val="003B4F"/>
+                </a:solidFill>
+                <a:latin typeface="Courier"/>
+              </a:rPr>
+              <a:t> needle_length_mm)) </a:t>
+            </a:r>
+            <a:r>
+              <a:rPr>
+                <a:solidFill>
+                  <a:srgbClr val="5E5E5E"/>
+                </a:solidFill>
+                <a:latin typeface="Courier"/>
+              </a:rPr>
+              <a:t>+</a:t>
+            </a:r>
+            <a:br/>
+            <a:r>
+              <a:rPr>
+                <a:solidFill>
+                  <a:srgbClr val="003B4F"/>
+                </a:solidFill>
+                <a:latin typeface="Courier"/>
+              </a:rPr>
+              <a:t>  </a:t>
+            </a:r>
+            <a:r>
+              <a:rPr>
+                <a:solidFill>
+                  <a:srgbClr val="4758AB"/>
+                </a:solidFill>
+                <a:latin typeface="Courier"/>
+              </a:rPr>
+              <a:t>geom_boxplot</a:t>
+            </a:r>
+            <a:r>
+              <a:rPr>
+                <a:solidFill>
+                  <a:srgbClr val="003B4F"/>
+                </a:solidFill>
+                <a:latin typeface="Courier"/>
+              </a:rPr>
+              <a:t>() </a:t>
+            </a:r>
+            <a:r>
+              <a:rPr>
+                <a:solidFill>
+                  <a:srgbClr val="5E5E5E"/>
+                </a:solidFill>
+                <a:latin typeface="Courier"/>
+              </a:rPr>
+              <a:t>+</a:t>
+            </a:r>
+            <a:br/>
+            <a:r>
+              <a:rPr>
+                <a:solidFill>
+                  <a:srgbClr val="003B4F"/>
+                </a:solidFill>
+                <a:latin typeface="Courier"/>
+              </a:rPr>
+              <a:t>  </a:t>
+            </a:r>
+            <a:r>
+              <a:rPr>
+                <a:solidFill>
+                  <a:srgbClr val="4758AB"/>
+                </a:solidFill>
+                <a:latin typeface="Courier"/>
+              </a:rPr>
+              <a:t>geom_jitter</a:t>
+            </a:r>
+            <a:r>
+              <a:rPr>
+                <a:solidFill>
+                  <a:srgbClr val="003B4F"/>
+                </a:solidFill>
+                <a:latin typeface="Courier"/>
+              </a:rPr>
+              <a:t>(</a:t>
+            </a:r>
+            <a:r>
+              <a:rPr>
+                <a:solidFill>
+                  <a:srgbClr val="657422"/>
+                </a:solidFill>
+                <a:latin typeface="Courier"/>
+              </a:rPr>
+              <a:t>width =</a:t>
+            </a:r>
+            <a:r>
+              <a:rPr>
+                <a:solidFill>
+                  <a:srgbClr val="003B4F"/>
+                </a:solidFill>
+                <a:latin typeface="Courier"/>
+              </a:rPr>
+              <a:t> </a:t>
+            </a:r>
+            <a:r>
+              <a:rPr>
+                <a:solidFill>
+                  <a:srgbClr val="AD0000"/>
+                </a:solidFill>
+                <a:latin typeface="Courier"/>
+              </a:rPr>
+              <a:t>0.15</a:t>
+            </a:r>
+            <a:r>
+              <a:rPr>
+                <a:solidFill>
+                  <a:srgbClr val="003B4F"/>
+                </a:solidFill>
+                <a:latin typeface="Courier"/>
+              </a:rPr>
+              <a:t>, </a:t>
+            </a:r>
+            <a:r>
+              <a:rPr>
+                <a:solidFill>
+                  <a:srgbClr val="657422"/>
+                </a:solidFill>
+                <a:latin typeface="Courier"/>
+              </a:rPr>
+              <a:t>alpha =</a:t>
+            </a:r>
+            <a:r>
+              <a:rPr>
+                <a:solidFill>
+                  <a:srgbClr val="003B4F"/>
+                </a:solidFill>
+                <a:latin typeface="Courier"/>
+              </a:rPr>
+              <a:t> </a:t>
+            </a:r>
+            <a:r>
+              <a:rPr>
+                <a:solidFill>
+                  <a:srgbClr val="AD0000"/>
+                </a:solidFill>
+                <a:latin typeface="Courier"/>
+              </a:rPr>
+              <a:t>0.6</a:t>
+            </a:r>
+            <a:r>
+              <a:rPr>
+                <a:solidFill>
+                  <a:srgbClr val="003B4F"/>
+                </a:solidFill>
+                <a:latin typeface="Courier"/>
+              </a:rPr>
+              <a:t>, </a:t>
+            </a:r>
+            <a:r>
+              <a:rPr>
+                <a:solidFill>
+                  <a:srgbClr val="657422"/>
+                </a:solidFill>
+                <a:latin typeface="Courier"/>
+              </a:rPr>
+              <a:t>color =</a:t>
+            </a:r>
+            <a:r>
+              <a:rPr>
+                <a:solidFill>
+                  <a:srgbClr val="003B4F"/>
+                </a:solidFill>
+                <a:latin typeface="Courier"/>
+              </a:rPr>
+              <a:t> </a:t>
+            </a:r>
+            <a:r>
+              <a:rPr>
+                <a:solidFill>
+                  <a:srgbClr val="20794D"/>
+                </a:solidFill>
+                <a:latin typeface="Courier"/>
+              </a:rPr>
+              <a:t>"tomato"</a:t>
+            </a:r>
+            <a:r>
+              <a:rPr>
+                <a:solidFill>
+                  <a:srgbClr val="003B4F"/>
+                </a:solidFill>
+                <a:latin typeface="Courier"/>
+              </a:rPr>
+              <a:t>) </a:t>
+            </a:r>
+            <a:r>
+              <a:rPr>
+                <a:solidFill>
+                  <a:srgbClr val="5E5E5E"/>
+                </a:solidFill>
+                <a:latin typeface="Courier"/>
+              </a:rPr>
+              <a:t>+</a:t>
+            </a:r>
+            <a:br/>
+            <a:r>
+              <a:rPr>
+                <a:solidFill>
+                  <a:srgbClr val="003B4F"/>
+                </a:solidFill>
+                <a:latin typeface="Courier"/>
+              </a:rPr>
+              <a:t>  </a:t>
+            </a:r>
+            <a:r>
+              <a:rPr>
+                <a:solidFill>
+                  <a:srgbClr val="4758AB"/>
+                </a:solidFill>
+                <a:latin typeface="Courier"/>
+              </a:rPr>
+              <a:t>labs</a:t>
+            </a:r>
+            <a:r>
+              <a:rPr>
+                <a:solidFill>
+                  <a:srgbClr val="003B4F"/>
+                </a:solidFill>
+                <a:latin typeface="Courier"/>
+              </a:rPr>
+              <a:t>(</a:t>
+            </a:r>
+            <a:r>
+              <a:rPr>
+                <a:solidFill>
+                  <a:srgbClr val="657422"/>
+                </a:solidFill>
+                <a:latin typeface="Courier"/>
+              </a:rPr>
+              <a:t>x =</a:t>
+            </a:r>
+            <a:r>
+              <a:rPr>
+                <a:solidFill>
+                  <a:srgbClr val="003B4F"/>
+                </a:solidFill>
+                <a:latin typeface="Courier"/>
+              </a:rPr>
+              <a:t> </a:t>
+            </a:r>
+            <a:r>
+              <a:rPr>
+                <a:solidFill>
+                  <a:srgbClr val="20794D"/>
+                </a:solidFill>
+                <a:latin typeface="Courier"/>
+              </a:rPr>
+              <a:t>"Sun exposure"</a:t>
+            </a:r>
+            <a:r>
+              <a:rPr>
+                <a:solidFill>
+                  <a:srgbClr val="003B4F"/>
+                </a:solidFill>
+                <a:latin typeface="Courier"/>
+              </a:rPr>
+              <a:t>, </a:t>
+            </a:r>
+            <a:r>
+              <a:rPr>
+                <a:solidFill>
+                  <a:srgbClr val="657422"/>
+                </a:solidFill>
+                <a:latin typeface="Courier"/>
+              </a:rPr>
+              <a:t>y =</a:t>
+            </a:r>
+            <a:r>
+              <a:rPr>
+                <a:solidFill>
+                  <a:srgbClr val="003B4F"/>
+                </a:solidFill>
+                <a:latin typeface="Courier"/>
+              </a:rPr>
+              <a:t> </a:t>
+            </a:r>
+            <a:r>
+              <a:rPr>
+                <a:solidFill>
+                  <a:srgbClr val="20794D"/>
+                </a:solidFill>
+                <a:latin typeface="Courier"/>
+              </a:rPr>
+              <a:t>"Needle length (mm)"</a:t>
+            </a:r>
+            <a:r>
+              <a:rPr>
+                <a:solidFill>
+                  <a:srgbClr val="003B4F"/>
+                </a:solidFill>
+                <a:latin typeface="Courier"/>
+              </a:rPr>
+              <a:t>)</a:t>
+            </a:r>
+            <a:br/>
+            <a:br/>
+            <a:r>
+              <a:rPr>
+                <a:solidFill>
+                  <a:srgbClr val="4758AB"/>
+                </a:solidFill>
+                <a:latin typeface="Courier"/>
+              </a:rPr>
+              <a:t>ggsave</a:t>
+            </a:r>
+            <a:r>
+              <a:rPr>
+                <a:solidFill>
+                  <a:srgbClr val="003B4F"/>
+                </a:solidFill>
+                <a:latin typeface="Courier"/>
+              </a:rPr>
+              <a:t>(</a:t>
+            </a:r>
+            <a:r>
+              <a:rPr>
+                <a:solidFill>
+                  <a:srgbClr val="20794D"/>
+                </a:solidFill>
+                <a:latin typeface="Courier"/>
+              </a:rPr>
+              <a:t>"figures/needle_length.png"</a:t>
+            </a:r>
+            <a:r>
+              <a:rPr>
+                <a:solidFill>
+                  <a:srgbClr val="003B4F"/>
+                </a:solidFill>
+                <a:latin typeface="Courier"/>
+              </a:rPr>
+              <a:t>,</a:t>
+            </a:r>
+            <a:br/>
+            <a:r>
+              <a:rPr>
+                <a:solidFill>
+                  <a:srgbClr val="003B4F"/>
+                </a:solidFill>
+                <a:latin typeface="Courier"/>
+              </a:rPr>
+              <a:t>       </a:t>
+            </a:r>
+            <a:r>
+              <a:rPr>
+                <a:solidFill>
+                  <a:srgbClr val="657422"/>
+                </a:solidFill>
+                <a:latin typeface="Courier"/>
+              </a:rPr>
+              <a:t>plot =</a:t>
+            </a:r>
+            <a:r>
+              <a:rPr>
+                <a:solidFill>
+                  <a:srgbClr val="003B4F"/>
+                </a:solidFill>
+                <a:latin typeface="Courier"/>
+              </a:rPr>
+              <a:t> needle_plot,</a:t>
+            </a:r>
+            <a:br/>
+            <a:r>
+              <a:rPr>
+                <a:solidFill>
+                  <a:srgbClr val="003B4F"/>
+                </a:solidFill>
+                <a:latin typeface="Courier"/>
+              </a:rPr>
+              <a:t>       </a:t>
+            </a:r>
+            <a:r>
+              <a:rPr>
+                <a:solidFill>
+                  <a:srgbClr val="657422"/>
+                </a:solidFill>
+                <a:latin typeface="Courier"/>
+              </a:rPr>
+              <a:t>width =</a:t>
+            </a:r>
+            <a:r>
+              <a:rPr>
+                <a:solidFill>
+                  <a:srgbClr val="003B4F"/>
+                </a:solidFill>
+                <a:latin typeface="Courier"/>
+              </a:rPr>
+              <a:t> </a:t>
+            </a:r>
+            <a:r>
+              <a:rPr>
+                <a:solidFill>
+                  <a:srgbClr val="AD0000"/>
+                </a:solidFill>
+                <a:latin typeface="Courier"/>
+              </a:rPr>
+              <a:t>3</a:t>
+            </a:r>
+            <a:r>
+              <a:rPr>
+                <a:solidFill>
+                  <a:srgbClr val="003B4F"/>
+                </a:solidFill>
+                <a:latin typeface="Courier"/>
+              </a:rPr>
+              <a:t>, </a:t>
+            </a:r>
+            <a:r>
+              <a:rPr>
+                <a:solidFill>
+                  <a:srgbClr val="657422"/>
+                </a:solidFill>
+                <a:latin typeface="Courier"/>
+              </a:rPr>
+              <a:t>height =</a:t>
+            </a:r>
+            <a:r>
+              <a:rPr>
+                <a:solidFill>
+                  <a:srgbClr val="003B4F"/>
+                </a:solidFill>
+                <a:latin typeface="Courier"/>
+              </a:rPr>
+              <a:t> </a:t>
+            </a:r>
+            <a:r>
+              <a:rPr>
+                <a:solidFill>
+                  <a:srgbClr val="AD0000"/>
+                </a:solidFill>
+                <a:latin typeface="Courier"/>
+              </a:rPr>
+              <a:t>3</a:t>
+            </a:r>
+            <a:r>
+              <a:rPr>
+                <a:solidFill>
+                  <a:srgbClr val="003B4F"/>
+                </a:solidFill>
+                <a:latin typeface="Courier"/>
+              </a:rPr>
+              <a:t>, </a:t>
+            </a:r>
+            <a:r>
+              <a:rPr>
+                <a:solidFill>
+                  <a:srgbClr val="657422"/>
+                </a:solidFill>
+                <a:latin typeface="Courier"/>
+              </a:rPr>
+              <a:t>units =</a:t>
+            </a:r>
+            <a:r>
+              <a:rPr>
+                <a:solidFill>
+                  <a:srgbClr val="003B4F"/>
+                </a:solidFill>
+                <a:latin typeface="Courier"/>
+              </a:rPr>
+              <a:t> </a:t>
+            </a:r>
+            <a:r>
+              <a:rPr>
+                <a:solidFill>
+                  <a:srgbClr val="20794D"/>
+                </a:solidFill>
+                <a:latin typeface="Courier"/>
+              </a:rPr>
+              <a:t>"in"</a:t>
+            </a:r>
+            <a:r>
+              <a:rPr>
+                <a:solidFill>
+                  <a:srgbClr val="003B4F"/>
+                </a:solidFill>
+                <a:latin typeface="Courier"/>
+              </a:rPr>
+              <a:t>, </a:t>
+            </a:r>
+            <a:r>
+              <a:rPr>
+                <a:solidFill>
+                  <a:srgbClr val="657422"/>
+                </a:solidFill>
+                <a:latin typeface="Courier"/>
+              </a:rPr>
+              <a:t>dpi =</a:t>
+            </a:r>
+            <a:r>
+              <a:rPr>
+                <a:solidFill>
+                  <a:srgbClr val="003B4F"/>
+                </a:solidFill>
+                <a:latin typeface="Courier"/>
+              </a:rPr>
+              <a:t> </a:t>
+            </a:r>
+            <a:r>
+              <a:rPr>
+                <a:solidFill>
+                  <a:srgbClr val="AD0000"/>
+                </a:solidFill>
+                <a:latin typeface="Courier"/>
+              </a:rPr>
+              <a:t>300</a:t>
+            </a:r>
+            <a:r>
+              <a:rPr>
+                <a:solidFill>
+                  <a:srgbClr val="003B4F"/>
+                </a:solidFill>
+                <a:latin typeface="Courier"/>
+              </a:rPr>
+              <a:t>)</a:t>
+            </a:r>
+          </a:p>
+          <a:p>
+            <a:pPr lvl="0" indent="0" marL="1270000">
+              <a:buNone/>
+            </a:pPr>
+            <a:r>
+              <a:rPr sz="2000" b="1"/>
+              <a:t>Warning</a:t>
+            </a:r>
+          </a:p>
+          <a:p>
+            <a:pPr lvl="0" indent="0" marL="1270000">
+              <a:buNone/>
+            </a:pPr>
+            <a:r>
+              <a:rPr sz="2000" b="1"/>
+              <a:t>⚠️ Watch out!</a:t>
+            </a:r>
+          </a:p>
+          <a:p>
+            <a:pPr lvl="0" indent="0" marL="1270000">
+              <a:buNone/>
+            </a:pPr>
+            <a:r>
+              <a:rPr sz="2000">
+                <a:latin typeface="Courier"/>
+              </a:rPr>
+              <a:t>ggsave()</a:t>
+            </a:r>
+            <a:r>
+              <a:rPr sz="2000"/>
+              <a:t> wants the </a:t>
+            </a:r>
+            <a:r>
+              <a:rPr sz="2000" b="1"/>
+              <a:t>filename first</a:t>
+            </a:r>
+            <a:r>
+              <a:rPr sz="2000"/>
+              <a:t>, then </a:t>
+            </a:r>
+            <a:r>
+              <a:rPr sz="2000">
+                <a:latin typeface="Courier"/>
+              </a:rPr>
+              <a:t>plot =</a:t>
+            </a:r>
+            <a:r>
+              <a:rPr sz="2000"/>
+              <a:t>. Always use </a:t>
+            </a:r>
+            <a:r>
+              <a:rPr sz="2000">
+                <a:latin typeface="Courier"/>
+              </a:rPr>
+              <a:t>dpi = 300</a:t>
+            </a:r>
+            <a:r>
+              <a:rPr sz="2000"/>
+              <a:t> — print/poster quality.</a:t>
+            </a:r>
+          </a:p>
+        </p:txBody>
+      </p:sp>
+      <p:sp>
+        <p:nvSpPr>
+          <p:cNvPr id="4" name="Content Placeholder 3"/>
+          <p:cNvSpPr>
+            <a:spLocks noGrp="1"/>
+          </p:cNvSpPr>
+          <p:nvPr>
+            <p:ph idx="2" sz="half"/>
+          </p:nvPr>
+        </p:nvSpPr>
+        <p:spPr/>
+        <p:txBody>
+          <a:bodyPr/>
+          <a:lstStyle/>
+          <a:p>
+            <a:pPr lvl="0" indent="0" marL="1270000">
+              <a:buNone/>
+            </a:pPr>
+            <a:r>
+              <a:rPr sz="2000" b="1"/>
+              <a:t>Note</a:t>
+            </a:r>
+          </a:p>
+          <a:p>
+            <a:pPr lvl="0" indent="0" marL="1270000">
+              <a:buNone/>
+            </a:pPr>
+            <a:r>
+              <a:rPr sz="2000" b="1"/>
+              <a:t>📖 File format tip</a:t>
+            </a:r>
+          </a:p>
+          <a:p>
+            <a:pPr lvl="0" indent="0" marL="1270000">
+              <a:buNone/>
+            </a:pPr>
+            <a:r>
+              <a:rPr sz="2000"/>
+              <a:t>Save figures as </a:t>
+            </a:r>
+            <a:r>
+              <a:rPr sz="2000" b="1"/>
+              <a:t>PNG</a:t>
+            </a:r>
+            <a:r>
+              <a:rPr sz="2000"/>
+              <a:t> for reports and submissions.</a:t>
+            </a:r>
+          </a:p>
+        </p:txBody>
+      </p:sp>
+    </p:spTree>
+  </p:cSld>
+</p:sld>
+</file>
+
+<file path=ppt/slides/slide29.xml><?xml version="1.0" encoding="utf-8"?>
+<p:sld xmlns:a="http://schemas.openxmlformats.org/drawingml/2006/main" xmlns:r="http://schemas.openxmlformats.org/officeDocument/2006/relationships" xmlns:p="http://schemas.openxmlformats.org/presentationml/2006/main">
+  <p:cSld>
+    <p:spTree>
+      <p:nvGrpSpPr>
+        <p:cNvPr id="1" name=""/>
+        <p:cNvGrpSpPr/>
+        <p:nvPr/>
+      </p:nvGrpSpPr>
+      <p:grpSpPr>
+        <a:xfrm>
+          <a:off x="0" y="0"/>
+          <a:ext cx="0" cy="0"/>
+          <a:chOff x="0" y="0"/>
+          <a:chExt cx="0" cy="0"/>
+        </a:xfrm>
+      </p:grpSpPr>
+      <p:sp>
+        <p:nvSpPr>
+          <p:cNvPr id="2" name="Title 1"/>
+          <p:cNvSpPr>
+            <a:spLocks noGrp="1"/>
+          </p:cNvSpPr>
+          <p:nvPr>
+            <p:ph type="title"/>
+          </p:nvPr>
+        </p:nvSpPr>
+        <p:spPr>
+          <a:xfrm>
+            <a:off x="0" y="0"/>
+            <a:ext cx="9144000" cy="602780"/>
+          </a:xfrm>
+          <a:solidFill>
+            <a:srgbClr val="70121D"/>
+          </a:solidFill>
+        </p:spPr>
+        <p:txBody>
+          <a:bodyPr/>
+          <a:lstStyle/>
+          <a:p>
+            <a:pPr lvl="0" indent="0" marL="0">
+              <a:buNone/>
+            </a:pPr>
+            <a:r>
+              <a:rPr/>
+              <a:t>Wrap-up</a:t>
+            </a:r>
+          </a:p>
+        </p:txBody>
+      </p:sp>
+      <p:sp>
+        <p:nvSpPr>
+          <p:cNvPr id="3" name="Content Placeholder 2"/>
+          <p:cNvSpPr>
+            <a:spLocks noGrp="1"/>
+          </p:cNvSpPr>
+          <p:nvPr>
+            <p:ph idx="1" sz="half"/>
+          </p:nvPr>
+        </p:nvSpPr>
+        <p:spPr/>
+        <p:txBody>
+          <a:bodyPr/>
+          <a:lstStyle/>
+          <a:p>
+            <a:pPr lvl="0" indent="0" marL="0">
+              <a:buNone/>
+            </a:pPr>
+            <a:r>
+              <a:rPr/>
+              <a:t>Today you:</a:t>
+            </a:r>
+          </a:p>
+          <a:p>
+            <a:pPr lvl="0"/>
+            <a:r>
+              <a:rPr/>
+              <a:t>Turned a question into a testable </a:t>
+            </a:r>
+            <a:r>
+              <a:rPr b="1"/>
+              <a:t>H₀ / Hₐ</a:t>
+            </a:r>
+          </a:p>
+          <a:p>
+            <a:pPr lvl="0"/>
+            <a:r>
+              <a:rPr/>
+              <a:t>Organized a project folder with </a:t>
+            </a:r>
+            <a:r>
+              <a:rPr b="1"/>
+              <a:t>data/scripts/figures</a:t>
+            </a:r>
+          </a:p>
+          <a:p>
+            <a:pPr lvl="0"/>
+            <a:r>
+              <a:rPr/>
+              <a:t>Ran your first R code — objects, functions, vectors, packages</a:t>
+            </a:r>
+          </a:p>
+          <a:p>
+            <a:pPr lvl="0"/>
+            <a:r>
+              <a:rPr/>
+              <a:t>Loaded real data and made — and saved — your </a:t>
+            </a:r>
+            <a:r>
+              <a:rPr b="1"/>
+              <a:t>first </a:t>
+            </a:r>
+            <a:r>
+              <a:rPr b="1">
+                <a:latin typeface="Courier"/>
+              </a:rPr>
+              <a:t>ggplot</a:t>
+            </a:r>
+          </a:p>
+          <a:p>
+            <a:pPr lvl="0"/>
+            <a:r>
+              <a:rPr/>
+              <a:t>Saw why </a:t>
+            </a:r>
+            <a:r>
+              <a:rPr b="1"/>
+              <a:t>64 rows is not 64 observations</a:t>
+            </a:r>
+            <a:r>
+              <a:rPr/>
+              <a:t>, and collapsed them to the 4 trees we actually replicated</a:t>
+            </a:r>
+          </a:p>
+          <a:p>
+            <a:pPr lvl="0" indent="0" marL="1270000">
+              <a:buNone/>
+            </a:pPr>
+            <a:r>
+              <a:rPr sz="2000" b="1"/>
+              <a:t>Tip</a:t>
+            </a:r>
+          </a:p>
+          <a:p>
+            <a:pPr lvl="0" indent="0" marL="1270000">
+              <a:buNone/>
+            </a:pPr>
+            <a:r>
+              <a:rPr sz="2000" b="1"/>
+              <a:t>🖐 Before next class</a:t>
+            </a:r>
+          </a:p>
+          <a:p>
+            <a:pPr lvl="0" indent="0" marL="1270000">
+              <a:buNone/>
+            </a:pPr>
+            <a:r>
+              <a:rPr sz="2000"/>
+              <a:t>Finish the worksheet: load </a:t>
+            </a:r>
+            <a:r>
+              <a:rPr sz="2000">
+                <a:latin typeface="Courier"/>
+              </a:rPr>
+              <a:t>pine_data.csv</a:t>
+            </a:r>
+            <a:r>
+              <a:rPr sz="2000"/>
+              <a:t>, run </a:t>
+            </a:r>
+            <a:r>
+              <a:rPr sz="2000">
+                <a:latin typeface="Courier"/>
+              </a:rPr>
+              <a:t>glimpse()</a:t>
+            </a:r>
+            <a:r>
+              <a:rPr sz="2000"/>
+              <a:t>, and make one more plot — </a:t>
+            </a:r>
+            <a:r>
+              <a:rPr sz="2000">
+                <a:latin typeface="Courier"/>
+              </a:rPr>
+              <a:t>needle_width_mm</a:t>
+            </a:r>
+            <a:r>
+              <a:rPr sz="2000"/>
+              <a:t> by </a:t>
+            </a:r>
+            <a:r>
+              <a:rPr sz="2000">
+                <a:latin typeface="Courier"/>
+              </a:rPr>
+              <a:t>side</a:t>
+            </a:r>
+            <a:r>
+              <a:rPr sz="2000"/>
+              <a:t> this time. Save it to </a:t>
+            </a:r>
+            <a:r>
+              <a:rPr sz="2000">
+                <a:latin typeface="Courier"/>
+              </a:rPr>
+              <a:t>figures/</a:t>
+            </a:r>
+            <a:r>
+              <a:rPr sz="2000"/>
+              <a:t>.</a:t>
+            </a:r>
+          </a:p>
+        </p:txBody>
+      </p:sp>
+      <p:sp>
+        <p:nvSpPr>
+          <p:cNvPr id="4" name="Content Placeholder 3"/>
+          <p:cNvSpPr>
+            <a:spLocks noGrp="1"/>
+          </p:cNvSpPr>
+          <p:nvPr>
+            <p:ph idx="2" sz="half"/>
+          </p:nvPr>
+        </p:nvSpPr>
+        <p:spPr/>
+        <p:txBody>
+          <a:bodyPr/>
+          <a:lstStyle/>
+          <a:p>
+            <a:pPr lvl="0" indent="0" marL="1270000">
+              <a:buNone/>
+            </a:pPr>
+            <a:r>
+              <a:rPr sz="2000" b="1"/>
+              <a:t>Note</a:t>
+            </a:r>
+          </a:p>
+          <a:p>
+            <a:pPr lvl="0" indent="0" marL="1270000">
+              <a:buNone/>
+            </a:pPr>
+            <a:r>
+              <a:rPr sz="2000" b="1"/>
+              <a:t>Up next — Wrangling Your Data</a:t>
+            </a:r>
+          </a:p>
+          <a:p>
+            <a:pPr lvl="0"/>
+            <a:r>
+              <a:rPr sz="2000">
+                <a:latin typeface="Courier"/>
+              </a:rPr>
+              <a:t>filter()</a:t>
+            </a:r>
+            <a:r>
+              <a:rPr sz="2000"/>
+              <a:t>, </a:t>
+            </a:r>
+            <a:r>
+              <a:rPr sz="2000">
+                <a:latin typeface="Courier"/>
+              </a:rPr>
+              <a:t>select()</a:t>
+            </a:r>
+            <a:r>
+              <a:rPr sz="2000"/>
+              <a:t>, </a:t>
+            </a:r>
+            <a:r>
+              <a:rPr sz="2000">
+                <a:latin typeface="Courier"/>
+              </a:rPr>
+              <a:t>mutate()</a:t>
+            </a:r>
+            <a:r>
+              <a:rPr sz="2000"/>
+              <a:t>, </a:t>
+            </a:r>
+            <a:r>
+              <a:rPr sz="2000">
+                <a:latin typeface="Courier"/>
+              </a:rPr>
+              <a:t>arrange()</a:t>
+            </a:r>
+          </a:p>
+          <a:p>
+            <a:pPr lvl="0"/>
+            <a:r>
+              <a:rPr sz="2000"/>
+              <a:t>Cleaning a genuinely messy version of this dataset</a:t>
+            </a:r>
+          </a:p>
+          <a:p>
+            <a:pPr lvl="0"/>
+            <a:r>
+              <a:rPr sz="2000"/>
+              <a:t>The pipe </a:t>
+            </a:r>
+            <a:r>
+              <a:rPr sz="2000">
+                <a:latin typeface="Courier"/>
+              </a:rPr>
+              <a:t>|&gt;</a:t>
+            </a:r>
+            <a:r>
+              <a:rPr sz="2000"/>
+              <a:t> and building a pipeline</a:t>
             </a:r>
           </a:p>
         </p:txBody>
@@ -9188,6 +11088,206 @@
 </p:sld>
 </file>
 
+<file path=ppt/slides/slide30.xml><?xml version="1.0" encoding="utf-8"?>
+<p:sld xmlns:a="http://schemas.openxmlformats.org/drawingml/2006/main" xmlns:r="http://schemas.openxmlformats.org/officeDocument/2006/relationships" xmlns:p="http://schemas.openxmlformats.org/presentationml/2006/main">
+  <p:cSld>
+    <p:spTree>
+      <p:nvGrpSpPr>
+        <p:cNvPr id="1" name=""/>
+        <p:cNvGrpSpPr/>
+        <p:nvPr/>
+      </p:nvGrpSpPr>
+      <p:grpSpPr>
+        <a:xfrm>
+          <a:off x="0" y="0"/>
+          <a:ext cx="0" cy="0"/>
+          <a:chOff x="0" y="0"/>
+          <a:chExt cx="0" cy="0"/>
+        </a:xfrm>
+      </p:grpSpPr>
+      <p:sp>
+        <p:nvSpPr>
+          <p:cNvPr id="2" name="Title 1"/>
+          <p:cNvSpPr>
+            <a:spLocks noGrp="1"/>
+          </p:cNvSpPr>
+          <p:nvPr>
+            <p:ph type="title"/>
+          </p:nvPr>
+        </p:nvSpPr>
+        <p:spPr>
+          <a:xfrm>
+            <a:off x="0" y="0"/>
+            <a:ext cx="9144000" cy="582780"/>
+          </a:xfrm>
+        </p:spPr>
+        <p:txBody>
+          <a:bodyPr/>
+          <a:lstStyle/>
+          <a:p>
+            <a:pPr lvl="0" indent="0" marL="0">
+              <a:buNone/>
+            </a:pPr>
+            <a:r>
+              <a:rPr/>
+              <a:t>Getting unstuck</a:t>
+            </a:r>
+          </a:p>
+        </p:txBody>
+      </p:sp>
+      <p:sp>
+        <p:nvSpPr>
+          <p:cNvPr id="3" name="Content Placeholder 2"/>
+          <p:cNvSpPr>
+            <a:spLocks noGrp="1"/>
+          </p:cNvSpPr>
+          <p:nvPr>
+            <p:ph idx="1"/>
+          </p:nvPr>
+        </p:nvSpPr>
+        <p:spPr/>
+        <p:txBody>
+          <a:bodyPr/>
+          <a:lstStyle/>
+          <a:p>
+            <a:pPr lvl="0" indent="0" marL="0">
+              <a:buNone/>
+            </a:pPr>
+            <a:r>
+              <a:rPr/>
+              <a:t>When code breaks — and it will, that is normal:</a:t>
+            </a:r>
+          </a:p>
+          <a:p>
+            <a:pPr lvl="0" indent="-342900" marL="342900">
+              <a:buAutoNum type="arabicPeriod"/>
+            </a:pPr>
+            <a:r>
+              <a:rPr/>
+              <a:t>Read the </a:t>
+            </a:r>
+            <a:r>
+              <a:rPr b="1"/>
+              <a:t>error message</a:t>
+            </a:r>
+            <a:r>
+              <a:rPr/>
+              <a:t> out loud; it usually names the line</a:t>
+            </a:r>
+          </a:p>
+          <a:p>
+            <a:pPr lvl="0" indent="-342900" marL="342900">
+              <a:buAutoNum type="arabicPeriod"/>
+            </a:pPr>
+            <a:r>
+              <a:rPr/>
+              <a:t>Check the usual suspects: </a:t>
+            </a:r>
+            <a:r>
+              <a:rPr>
+                <a:latin typeface="Courier"/>
+              </a:rPr>
+              <a:t>library(tidyverse)</a:t>
+            </a:r>
+            <a:r>
+              <a:rPr/>
+              <a:t> loaded? Spelling? A missing </a:t>
+            </a:r>
+            <a:r>
+              <a:rPr>
+                <a:latin typeface="Courier"/>
+              </a:rPr>
+              <a:t>)</a:t>
+            </a:r>
+            <a:r>
+              <a:rPr/>
+              <a:t> or </a:t>
+            </a:r>
+            <a:r>
+              <a:rPr>
+                <a:latin typeface="Courier"/>
+              </a:rPr>
+              <a:t>+</a:t>
+            </a:r>
+            <a:r>
+              <a:rPr/>
+              <a:t> at the </a:t>
+            </a:r>
+            <a:r>
+              <a:rPr i="1"/>
+              <a:t>start</a:t>
+            </a:r>
+            <a:r>
+              <a:rPr/>
+              <a:t> of a line?</a:t>
+            </a:r>
+          </a:p>
+          <a:p>
+            <a:pPr lvl="0" indent="-342900" marL="342900">
+              <a:buAutoNum type="arabicPeriod"/>
+            </a:pPr>
+            <a:r>
+              <a:rPr>
+                <a:latin typeface="Courier"/>
+              </a:rPr>
+              <a:t>?function_name</a:t>
+            </a:r>
+            <a:r>
+              <a:rPr/>
+              <a:t> opens the help page</a:t>
+            </a:r>
+          </a:p>
+          <a:p>
+            <a:pPr lvl="0" indent="-342900" marL="342900">
+              <a:buAutoNum type="arabicPeriod"/>
+            </a:pPr>
+            <a:r>
+              <a:rPr/>
+              <a:t>Bring the </a:t>
+            </a:r>
+            <a:r>
+              <a:rPr b="1"/>
+              <a:t>exact error</a:t>
+            </a:r>
+            <a:r>
+              <a:rPr/>
+              <a:t> (copy-paste it) to class or office hours</a:t>
+            </a:r>
+          </a:p>
+          <a:p>
+            <a:pPr lvl="0" indent="0" marL="1270000">
+              <a:buNone/>
+            </a:pPr>
+            <a:r>
+              <a:rPr sz="2000" b="1"/>
+              <a:t>Note</a:t>
+            </a:r>
+          </a:p>
+          <a:p>
+            <a:pPr lvl="0" indent="0" marL="1270000">
+              <a:buNone/>
+            </a:pPr>
+            <a:r>
+              <a:rPr sz="2000" b="1"/>
+              <a:t>✅ Key idea</a:t>
+            </a:r>
+          </a:p>
+          <a:p>
+            <a:pPr lvl="0" indent="0" marL="1270000">
+              <a:buNone/>
+            </a:pPr>
+            <a:r>
+              <a:rPr sz="2000"/>
+              <a:t>Every working scientist googles error messages daily. Getting stuck is not failing — it is the job.</a:t>
+            </a:r>
+          </a:p>
+        </p:txBody>
+      </p:sp>
+    </p:spTree>
+  </p:cSld>
+</p:sld>
+</file>
+
 <file path=ppt/slides/slide4.xml><?xml version="1.0" encoding="utf-8"?>
 <p:sld xmlns:a="http://schemas.openxmlformats.org/drawingml/2006/main" xmlns:r="http://schemas.openxmlformats.org/officeDocument/2006/relationships" xmlns:p="http://schemas.openxmlformats.org/presentationml/2006/main">
   <p:cSld>
@@ -9295,7 +11395,7 @@
             <a:pPr lvl="0"/>
             <a:r>
               <a:rPr i="1"/>
-              <a:t>“Needles on the sheltered side of a tree are longer”</a:t>
+              <a:t>“Needles on the shady side of a tree are longer”</a:t>
             </a:r>
             <a:r>
               <a:rPr/>
@@ -9833,7 +11933,7 @@
             </a:r>
             <a:r>
               <a:rPr b="1"/>
-              <a:t>north/shady</a:t>
+              <a:t>shady</a:t>
             </a:r>
             <a:r>
               <a:rPr/>
@@ -9841,7 +11941,7 @@
             </a:r>
             <a:r>
               <a:rPr b="1"/>
-              <a:t>south/sunny</a:t>
+              <a:t>sunny</a:t>
             </a:r>
             <a:r>
               <a:rPr/>
@@ -9909,7 +12009,7 @@
             <a:pPr lvl="0"/>
             <a:r>
               <a:rPr sz="2000" b="1"/>
-              <a:t>Precition</a:t>
+              <a:t>Prediction</a:t>
             </a:r>
             <a:r>
               <a:rPr sz="2000"/>
@@ -10198,7 +12298,7 @@
             </a:r>
             <a:r>
               <a:rPr sz="2000"/>
-              <a:t> side of tree — what we group by</a:t>
+              <a:t> sun exposure — shady or sunny — what we group by</a:t>
             </a:r>
           </a:p>
           <a:p>
@@ -10252,7 +12352,7 @@
             </a:pPr>
             <a:r>
               <a:rPr sz="2000"/>
-              <a:t>Each group collects needles from the shady side </a:t>
+              <a:t>Each team collects needles from the shady side </a:t>
             </a:r>
             <a:r>
               <a:rPr sz="2000" b="1"/>
@@ -10260,7 +12360,7 @@
             </a:r>
             <a:r>
               <a:rPr sz="2000"/>
-              <a:t> the sunny side of the same trees, using one agreed-on method — same height, same “mature needle” definition, same spot on the branch.</a:t>
+              <a:t> the sunny side of the same tree, using one agreed-on method — same height, same “mature needle” definition, same spot on the branch.</a:t>
             </a:r>
           </a:p>
           <a:p>
@@ -10269,7 +12369,37 @@
             </a:pPr>
             <a:r>
               <a:rPr sz="2000"/>
-              <a:t>We are going to the field to collect pine needles - easy but yes… and then come back, decide how to measure, measure them, enter data in excel</a:t>
+              <a:t>Then we come back, agree on how to measure, measure the needles, and enter the data in Excel.</a:t>
+            </a:r>
+          </a:p>
+          <a:p>
+            <a:pPr lvl="0" indent="0" marL="1270000">
+              <a:buNone/>
+            </a:pPr>
+            <a:r>
+              <a:rPr sz="2000" b="1"/>
+              <a:t>Note</a:t>
+            </a:r>
+          </a:p>
+          <a:p>
+            <a:pPr lvl="0" indent="0" marL="1270000">
+              <a:buNone/>
+            </a:pPr>
+            <a:r>
+              <a:rPr sz="2000" b="1"/>
+              <a:t>Because both sides come from the same tree, the two measurements are </a:t>
+            </a:r>
+            <a:r>
+              <a:rPr sz="2000" b="1" i="1"/>
+              <a:t>paired</a:t>
+            </a:r>
+            <a:r>
+              <a:rPr sz="2000" b="1"/>
+              <a:t>.</a:t>
+            </a:r>
+            <a:r>
+              <a:rPr sz="2000"/>
+              <a:t> Keep track of which team measured which tree — we will need that structure later today, and again in Week 4.</a:t>
             </a:r>
           </a:p>
         </p:txBody>

--- a/docs/content/getting_started/getting_started_lecture.pptx
+++ b/docs/content/getting_started/getting_started_lecture.pptx
@@ -35,6 +35,7 @@
     <p:sldId id="283" r:id="rId29"/>
     <p:sldId id="284" r:id="rId30"/>
     <p:sldId id="285" r:id="rId31"/>
+    <p:sldId id="286" r:id="rId32"/>
   </p:sldIdLst>
   <p:sldSz cx="9144000" cy="5143500" type="screen16x9"/>
   <p:notesSz cx="6858000" cy="9144000"/>
@@ -3841,6 +3842,44 @@
               <a:t>Without it, data are nearly useless — even to future-you.</a:t>
             </a:r>
           </a:p>
+          <a:p>
+            <a:pPr lvl="0" indent="0" marL="1270000">
+              <a:buNone/>
+            </a:pPr>
+            <a:r>
+              <a:rPr sz="2000" b="1"/>
+              <a:t>Note</a:t>
+            </a:r>
+          </a:p>
+          <a:p>
+            <a:pPr lvl="0" indent="0" marL="1270000">
+              <a:buNone/>
+            </a:pPr>
+            <a:r>
+              <a:rPr sz="2000" b="1"/>
+              <a:t>📖 Reference</a:t>
+            </a:r>
+          </a:p>
+          <a:p>
+            <a:pPr lvl="0" indent="0" marL="1270000">
+              <a:buNone/>
+            </a:pPr>
+            <a:r>
+              <a:rPr sz="2000"/>
+              <a:t>Gotelli &amp; Ellison, Ch. 8 — Managing and Curating Data.</a:t>
+            </a:r>
+          </a:p>
+          <a:p>
+            <a:pPr lvl="0" indent="0" marL="1270000">
+              <a:buNone/>
+            </a:pPr>
+            <a:r>
+              <a:rPr sz="2000">
+                <a:hlinkClick r:id="rId2"/>
+              </a:rPr>
+              <a:t>📖 R4DS §6 — Workflow: scripts and projects</a:t>
+            </a:r>
+          </a:p>
         </p:txBody>
       </p:sp>
     </p:spTree>
@@ -4863,6 +4902,17 @@
               <a:t> pane the moment you create it.</a:t>
             </a:r>
           </a:p>
+          <a:p>
+            <a:pPr lvl="0" indent="0" marL="1270000">
+              <a:buNone/>
+            </a:pPr>
+            <a:r>
+              <a:rPr sz="2000">
+                <a:hlinkClick r:id="rId2"/>
+              </a:rPr>
+              <a:t>📖 R4DS §2 — Workflow: basics</a:t>
+            </a:r>
+          </a:p>
         </p:txBody>
       </p:sp>
     </p:spTree>
@@ -5510,6 +5560,17 @@
               <a:t> — a named, reusable operation</a:t>
             </a:r>
           </a:p>
+          <a:p>
+            <a:pPr lvl="0" indent="0" marL="1270000">
+              <a:buNone/>
+            </a:pPr>
+            <a:r>
+              <a:rPr sz="2000">
+                <a:hlinkClick r:id="rId2"/>
+              </a:rPr>
+              <a:t>📖 R4DS §4 — Workflow: code style</a:t>
+            </a:r>
+          </a:p>
         </p:txBody>
       </p:sp>
     </p:spTree>
@@ -6215,6 +6276,21 @@
               <a:t> — loading it for today’s session (every time)</a:t>
             </a:r>
           </a:p>
+          <a:p>
+            <a:pPr lvl="0" indent="0" marL="1270000">
+              <a:buNone/>
+            </a:pPr>
+            <a:r>
+              <a:rPr sz="2000">
+                <a:hlinkClick r:id="rId2"/>
+              </a:rPr>
+              <a:t>📖 R4DS §1 — Data visualization</a:t>
+            </a:r>
+            <a:r>
+              <a:rPr sz="2000"/>
+              <a:t> opens with installing and loading the tidyverse.</a:t>
+            </a:r>
+          </a:p>
         </p:txBody>
       </p:sp>
     </p:spTree>
@@ -6807,6 +6883,17 @@
             <a:r>
               <a:rPr sz="2000"/>
               <a:t> — needle width in mm</a:t>
+            </a:r>
+          </a:p>
+          <a:p>
+            <a:pPr lvl="0" indent="0" marL="1270000">
+              <a:buNone/>
+            </a:pPr>
+            <a:r>
+              <a:rPr sz="2000">
+                <a:hlinkClick r:id="rId3"/>
+              </a:rPr>
+              <a:t>📖 R4DS §7 — Data import</a:t>
             </a:r>
           </a:p>
         </p:txBody>
@@ -7476,6 +7563,44 @@
               <a:t> your data is the single most important habit in this course — before you summarize or test anything, plot it.</a:t>
             </a:r>
           </a:p>
+          <a:p>
+            <a:pPr lvl="0" indent="0" marL="1270000">
+              <a:buNone/>
+            </a:pPr>
+            <a:r>
+              <a:rPr sz="2000" b="1"/>
+              <a:t>Note</a:t>
+            </a:r>
+          </a:p>
+          <a:p>
+            <a:pPr lvl="0" indent="0" marL="1270000">
+              <a:buNone/>
+            </a:pPr>
+            <a:r>
+              <a:rPr sz="2000" b="1"/>
+              <a:t>📖 Reference</a:t>
+            </a:r>
+          </a:p>
+          <a:p>
+            <a:pPr lvl="0" indent="0" marL="1270000">
+              <a:buNone/>
+            </a:pPr>
+            <a:r>
+              <a:rPr sz="2000"/>
+              <a:t>Whitlock &amp; Schluter, Ch. 2 — Displaying Data.</a:t>
+            </a:r>
+          </a:p>
+          <a:p>
+            <a:pPr lvl="0" indent="0" marL="1270000">
+              <a:buNone/>
+            </a:pPr>
+            <a:r>
+              <a:rPr sz="2000">
+                <a:hlinkClick r:id="rId3"/>
+              </a:rPr>
+              <a:t>📖 R4DS §1 — Data visualization</a:t>
+            </a:r>
+          </a:p>
         </p:txBody>
       </p:sp>
     </p:spTree>
@@ -9243,6 +9368,17 @@
               <a:t>.</a:t>
             </a:r>
           </a:p>
+          <a:p>
+            <a:pPr lvl="0" indent="0" marL="1270000">
+              <a:buNone/>
+            </a:pPr>
+            <a:r>
+              <a:rPr sz="2000">
+                <a:hlinkClick r:id="rId2"/>
+              </a:rPr>
+              <a:t>📖 R4DS §3 — Data transformation</a:t>
+            </a:r>
+          </a:p>
         </p:txBody>
       </p:sp>
     </p:spTree>
@@ -11118,6 +11254,273 @@
         <p:spPr>
           <a:xfrm>
             <a:off x="0" y="0"/>
+            <a:ext cx="9144000" cy="602780"/>
+          </a:xfrm>
+          <a:solidFill>
+            <a:srgbClr val="70121D"/>
+          </a:solidFill>
+        </p:spPr>
+        <p:txBody>
+          <a:bodyPr/>
+          <a:lstStyle/>
+          <a:p>
+            <a:pPr lvl="0" indent="0" marL="0">
+              <a:buNone/>
+            </a:pPr>
+            <a:r>
+              <a:rPr/>
+              <a:t>Readings</a:t>
+            </a:r>
+          </a:p>
+        </p:txBody>
+      </p:sp>
+      <p:sp>
+        <p:nvSpPr>
+          <p:cNvPr id="3" name="Content Placeholder 2"/>
+          <p:cNvSpPr>
+            <a:spLocks noGrp="1"/>
+          </p:cNvSpPr>
+          <p:nvPr>
+            <p:ph idx="1" sz="half"/>
+          </p:nvPr>
+        </p:nvSpPr>
+        <p:spPr/>
+        <p:txBody>
+          <a:bodyPr/>
+          <a:lstStyle/>
+          <a:p>
+            <a:pPr lvl="0" indent="0" marL="0">
+              <a:buNone/>
+            </a:pPr>
+            <a:r>
+              <a:rPr b="1"/>
+              <a:t>Before next class</a:t>
+            </a:r>
+            <a:r>
+              <a:rPr/>
+              <a:t> — both chapters are posted as PDFs on </a:t>
+            </a:r>
+            <a:r>
+              <a:rPr b="1"/>
+              <a:t>Canvas</a:t>
+            </a:r>
+            <a:r>
+              <a:rPr/>
+              <a:t>:</a:t>
+            </a:r>
+          </a:p>
+          <a:p>
+            <a:pPr lvl="0"/>
+            <a:r>
+              <a:rPr b="1"/>
+              <a:t>Whitlock &amp; Schluter</a:t>
+            </a:r>
+            <a:r>
+              <a:rPr/>
+              <a:t>, </a:t>
+            </a:r>
+            <a:r>
+              <a:rPr i="1"/>
+              <a:t>The Analysis of Biological Data</a:t>
+            </a:r>
+            <a:r>
+              <a:rPr/>
+              <a:t> — </a:t>
+            </a:r>
+            <a:r>
+              <a:rPr b="1"/>
+              <a:t>Ch. 1</a:t>
+            </a:r>
+            <a:r>
+              <a:rPr/>
+              <a:t>, Statistics and Samples (populations vs. samples, why we sample, sampling error)</a:t>
+            </a:r>
+          </a:p>
+          <a:p>
+            <a:pPr lvl="0"/>
+            <a:r>
+              <a:rPr b="1"/>
+              <a:t>Gotelli &amp; Ellison</a:t>
+            </a:r>
+            <a:r>
+              <a:rPr/>
+              <a:t>, </a:t>
+            </a:r>
+            <a:r>
+              <a:rPr i="1"/>
+              <a:t>A Primer of Ecological Statistics</a:t>
+            </a:r>
+            <a:r>
+              <a:rPr/>
+              <a:t> — </a:t>
+            </a:r>
+            <a:r>
+              <a:rPr b="1"/>
+              <a:t>Ch. 8</a:t>
+            </a:r>
+            <a:r>
+              <a:rPr/>
+              <a:t>, Managing and Curating Data (raw data, metadata, project organization)</a:t>
+            </a:r>
+          </a:p>
+          <a:p>
+            <a:pPr lvl="0" indent="0" marL="0">
+              <a:buNone/>
+            </a:pPr>
+            <a:r>
+              <a:rPr b="1"/>
+              <a:t>If you want more on the science and hypothesis side:</a:t>
+            </a:r>
+          </a:p>
+          <a:p>
+            <a:pPr lvl="0"/>
+            <a:r>
+              <a:rPr/>
+              <a:t>Whitlock &amp; Schluter, Ch. 2 — Displaying Data</a:t>
+            </a:r>
+          </a:p>
+          <a:p>
+            <a:pPr lvl="0"/>
+            <a:r>
+              <a:rPr/>
+              <a:t>Gotelli &amp; Ellison, Ch. 4 — Framing and Testing Hypotheses</a:t>
+            </a:r>
+          </a:p>
+        </p:txBody>
+      </p:sp>
+      <p:sp>
+        <p:nvSpPr>
+          <p:cNvPr id="4" name="Content Placeholder 3"/>
+          <p:cNvSpPr>
+            <a:spLocks noGrp="1"/>
+          </p:cNvSpPr>
+          <p:nvPr>
+            <p:ph idx="2" sz="half"/>
+          </p:nvPr>
+        </p:nvSpPr>
+        <p:spPr/>
+        <p:txBody>
+          <a:bodyPr/>
+          <a:lstStyle/>
+          <a:p>
+            <a:pPr lvl="0" indent="0" marL="1270000">
+              <a:buNone/>
+            </a:pPr>
+            <a:r>
+              <a:rPr sz="2000" b="1"/>
+              <a:t>Note</a:t>
+            </a:r>
+          </a:p>
+          <a:p>
+            <a:pPr lvl="0" indent="0" marL="1270000">
+              <a:buNone/>
+            </a:pPr>
+            <a:r>
+              <a:rPr sz="2000" b="1"/>
+              <a:t>📖 R for Data Science (2e)</a:t>
+            </a:r>
+          </a:p>
+          <a:p>
+            <a:pPr lvl="0" indent="0" marL="1270000">
+              <a:buNone/>
+            </a:pPr>
+            <a:r>
+              <a:rPr sz="2000"/>
+              <a:t>Free online at </a:t>
+            </a:r>
+            <a:r>
+              <a:rPr sz="2000">
+                <a:hlinkClick r:id="rId2"/>
+              </a:rPr>
+              <a:t>r4ds.hadley.nz</a:t>
+            </a:r>
+            <a:r>
+              <a:rPr sz="2000"/>
+              <a:t> — the R side of today:</a:t>
+            </a:r>
+          </a:p>
+          <a:p>
+            <a:pPr lvl="0"/>
+            <a:r>
+              <a:rPr sz="2000">
+                <a:hlinkClick r:id="rId3"/>
+              </a:rPr>
+              <a:t>§1 — Data visualization</a:t>
+            </a:r>
+          </a:p>
+          <a:p>
+            <a:pPr lvl="0"/>
+            <a:r>
+              <a:rPr sz="2000">
+                <a:hlinkClick r:id="rId4"/>
+              </a:rPr>
+              <a:t>§2 — Workflow: basics</a:t>
+            </a:r>
+          </a:p>
+          <a:p>
+            <a:pPr lvl="0"/>
+            <a:r>
+              <a:rPr sz="2000">
+                <a:hlinkClick r:id="rId5"/>
+              </a:rPr>
+              <a:t>§6 — Workflow: scripts and projects</a:t>
+            </a:r>
+          </a:p>
+          <a:p>
+            <a:pPr lvl="0"/>
+            <a:r>
+              <a:rPr sz="2000">
+                <a:hlinkClick r:id="rId6"/>
+              </a:rPr>
+              <a:t>§7 — Data import</a:t>
+            </a:r>
+          </a:p>
+          <a:p>
+            <a:pPr lvl="0"/>
+            <a:r>
+              <a:rPr sz="2000">
+                <a:hlinkClick r:id="rId7"/>
+              </a:rPr>
+              <a:t>§8 — Workflow: getting help</a:t>
+            </a:r>
+          </a:p>
+        </p:txBody>
+      </p:sp>
+    </p:spTree>
+  </p:cSld>
+</p:sld>
+</file>
+
+<file path=ppt/slides/slide31.xml><?xml version="1.0" encoding="utf-8"?>
+<p:sld xmlns:a="http://schemas.openxmlformats.org/drawingml/2006/main" xmlns:r="http://schemas.openxmlformats.org/officeDocument/2006/relationships" xmlns:p="http://schemas.openxmlformats.org/presentationml/2006/main">
+  <p:cSld>
+    <p:spTree>
+      <p:nvGrpSpPr>
+        <p:cNvPr id="1" name=""/>
+        <p:cNvGrpSpPr/>
+        <p:nvPr/>
+      </p:nvGrpSpPr>
+      <p:grpSpPr>
+        <a:xfrm>
+          <a:off x="0" y="0"/>
+          <a:ext cx="0" cy="0"/>
+          <a:chOff x="0" y="0"/>
+          <a:chExt cx="0" cy="0"/>
+        </a:xfrm>
+      </p:grpSpPr>
+      <p:sp>
+        <p:nvSpPr>
+          <p:cNvPr id="2" name="Title 1"/>
+          <p:cNvSpPr>
+            <a:spLocks noGrp="1"/>
+          </p:cNvSpPr>
+          <p:nvPr>
+            <p:ph type="title"/>
+          </p:nvPr>
+        </p:nvSpPr>
+        <p:spPr>
+          <a:xfrm>
+            <a:off x="0" y="0"/>
             <a:ext cx="9144000" cy="582780"/>
           </a:xfrm>
         </p:spPr>
@@ -11252,6 +11655,21 @@
             <a:r>
               <a:rPr/>
               <a:t> (copy-paste it) to class or office hours</a:t>
+            </a:r>
+          </a:p>
+          <a:p>
+            <a:pPr lvl="0" indent="0" marL="0">
+              <a:buNone/>
+            </a:pPr>
+            <a:r>
+              <a:rPr>
+                <a:hlinkClick r:id="rId2"/>
+              </a:rPr>
+              <a:t>📖 R4DS §8 — Workflow: getting help</a:t>
+            </a:r>
+            <a:r>
+              <a:rPr/>
+              <a:t> shows how to write a question others can actually answer.</a:t>
             </a:r>
           </a:p>
           <a:p>
@@ -11458,6 +11876,54 @@
             <a:r>
               <a:rPr sz="2000"/>
               <a:t> = a prediction that could, in principle, be proven wrong. A good hypothesis is one you could disprove.</a:t>
+            </a:r>
+          </a:p>
+          <a:p>
+            <a:pPr lvl="0" indent="0" marL="1270000">
+              <a:buNone/>
+            </a:pPr>
+            <a:r>
+              <a:rPr sz="2000" b="1"/>
+              <a:t>Note</a:t>
+            </a:r>
+          </a:p>
+          <a:p>
+            <a:pPr lvl="0" indent="0" marL="1270000">
+              <a:buNone/>
+            </a:pPr>
+            <a:r>
+              <a:rPr sz="2000" b="1"/>
+              <a:t>📖 Reference</a:t>
+            </a:r>
+          </a:p>
+          <a:p>
+            <a:pPr lvl="0" indent="0" marL="1270000">
+              <a:buNone/>
+            </a:pPr>
+            <a:r>
+              <a:rPr sz="2000"/>
+              <a:t>Whitlock &amp; Schluter, </a:t>
+            </a:r>
+            <a:r>
+              <a:rPr sz="2000" i="1"/>
+              <a:t>The Analysis of Biological Data</a:t>
+            </a:r>
+            <a:r>
+              <a:rPr sz="2000"/>
+              <a:t>, Ch. 1 — Statistics and Samples.</a:t>
+            </a:r>
+            <a:br/>
+            <a:r>
+              <a:rPr sz="2000"/>
+              <a:t>Gotelli &amp; Ellison, </a:t>
+            </a:r>
+            <a:r>
+              <a:rPr sz="2000" i="1"/>
+              <a:t>A Primer of Ecological Statistics</a:t>
+            </a:r>
+            <a:r>
+              <a:rPr sz="2000"/>
+              <a:t>, Ch. 4 — Framing and Testing Hypotheses.</a:t>
             </a:r>
           </a:p>
         </p:txBody>
@@ -12400,6 +12866,38 @@
             <a:r>
               <a:rPr sz="2000"/>
               <a:t> Keep track of which team measured which tree — we will need that structure later today, and again in Week 4.</a:t>
+            </a:r>
+          </a:p>
+          <a:p>
+            <a:pPr lvl="0" indent="0" marL="1270000">
+              <a:buNone/>
+            </a:pPr>
+            <a:r>
+              <a:rPr sz="2000" b="1"/>
+              <a:t>Note</a:t>
+            </a:r>
+          </a:p>
+          <a:p>
+            <a:pPr lvl="0" indent="0" marL="1270000">
+              <a:buNone/>
+            </a:pPr>
+            <a:r>
+              <a:rPr sz="2000" b="1"/>
+              <a:t>📖 Reference</a:t>
+            </a:r>
+          </a:p>
+          <a:p>
+            <a:pPr lvl="0" indent="0" marL="1270000">
+              <a:buNone/>
+            </a:pPr>
+            <a:r>
+              <a:rPr sz="2000"/>
+              <a:t>Whitlock &amp; Schluter, Ch. 1 — Statistics and Samples, on random sampling and what makes a sample representative.</a:t>
+            </a:r>
+            <a:br/>
+            <a:r>
+              <a:rPr sz="2000"/>
+              <a:t>Gotelli &amp; Ellison, Ch. 6 — Designing Successful Field Studies, on replication and pseudoreplication.</a:t>
             </a:r>
           </a:p>
         </p:txBody>

--- a/docs/content/getting_started/getting_started_lecture.pptx
+++ b/docs/content/getting_started/getting_started_lecture.pptx
@@ -35,7 +35,6 @@
     <p:sldId id="283" r:id="rId29"/>
     <p:sldId id="284" r:id="rId30"/>
     <p:sldId id="285" r:id="rId31"/>
-    <p:sldId id="286" r:id="rId32"/>
   </p:sldIdLst>
   <p:sldSz cx="9144000" cy="5143500" type="screen16x9"/>
   <p:notesSz cx="6858000" cy="9144000"/>
@@ -11482,221 +11481,6 @@
                 <a:hlinkClick r:id="rId7"/>
               </a:rPr>
               <a:t>§8 — Workflow: getting help</a:t>
-            </a:r>
-          </a:p>
-        </p:txBody>
-      </p:sp>
-    </p:spTree>
-  </p:cSld>
-</p:sld>
-</file>
-
-<file path=ppt/slides/slide31.xml><?xml version="1.0" encoding="utf-8"?>
-<p:sld xmlns:a="http://schemas.openxmlformats.org/drawingml/2006/main" xmlns:r="http://schemas.openxmlformats.org/officeDocument/2006/relationships" xmlns:p="http://schemas.openxmlformats.org/presentationml/2006/main">
-  <p:cSld>
-    <p:spTree>
-      <p:nvGrpSpPr>
-        <p:cNvPr id="1" name=""/>
-        <p:cNvGrpSpPr/>
-        <p:nvPr/>
-      </p:nvGrpSpPr>
-      <p:grpSpPr>
-        <a:xfrm>
-          <a:off x="0" y="0"/>
-          <a:ext cx="0" cy="0"/>
-          <a:chOff x="0" y="0"/>
-          <a:chExt cx="0" cy="0"/>
-        </a:xfrm>
-      </p:grpSpPr>
-      <p:sp>
-        <p:nvSpPr>
-          <p:cNvPr id="2" name="Title 1"/>
-          <p:cNvSpPr>
-            <a:spLocks noGrp="1"/>
-          </p:cNvSpPr>
-          <p:nvPr>
-            <p:ph type="title"/>
-          </p:nvPr>
-        </p:nvSpPr>
-        <p:spPr>
-          <a:xfrm>
-            <a:off x="0" y="0"/>
-            <a:ext cx="9144000" cy="582780"/>
-          </a:xfrm>
-        </p:spPr>
-        <p:txBody>
-          <a:bodyPr/>
-          <a:lstStyle/>
-          <a:p>
-            <a:pPr lvl="0" indent="0" marL="0">
-              <a:buNone/>
-            </a:pPr>
-            <a:r>
-              <a:rPr/>
-              <a:t>Getting unstuck</a:t>
-            </a:r>
-          </a:p>
-        </p:txBody>
-      </p:sp>
-      <p:sp>
-        <p:nvSpPr>
-          <p:cNvPr id="3" name="Content Placeholder 2"/>
-          <p:cNvSpPr>
-            <a:spLocks noGrp="1"/>
-          </p:cNvSpPr>
-          <p:nvPr>
-            <p:ph idx="1"/>
-          </p:nvPr>
-        </p:nvSpPr>
-        <p:spPr/>
-        <p:txBody>
-          <a:bodyPr/>
-          <a:lstStyle/>
-          <a:p>
-            <a:pPr lvl="0" indent="0" marL="0">
-              <a:buNone/>
-            </a:pPr>
-            <a:r>
-              <a:rPr/>
-              <a:t>When code breaks — and it will, that is normal:</a:t>
-            </a:r>
-          </a:p>
-          <a:p>
-            <a:pPr lvl="0" indent="-342900" marL="342900">
-              <a:buAutoNum type="arabicPeriod"/>
-            </a:pPr>
-            <a:r>
-              <a:rPr/>
-              <a:t>Read the </a:t>
-            </a:r>
-            <a:r>
-              <a:rPr b="1"/>
-              <a:t>error message</a:t>
-            </a:r>
-            <a:r>
-              <a:rPr/>
-              <a:t> out loud; it usually names the line</a:t>
-            </a:r>
-          </a:p>
-          <a:p>
-            <a:pPr lvl="0" indent="-342900" marL="342900">
-              <a:buAutoNum type="arabicPeriod"/>
-            </a:pPr>
-            <a:r>
-              <a:rPr/>
-              <a:t>Check the usual suspects: </a:t>
-            </a:r>
-            <a:r>
-              <a:rPr>
-                <a:latin typeface="Courier"/>
-              </a:rPr>
-              <a:t>library(tidyverse)</a:t>
-            </a:r>
-            <a:r>
-              <a:rPr/>
-              <a:t> loaded? Spelling? A missing </a:t>
-            </a:r>
-            <a:r>
-              <a:rPr>
-                <a:latin typeface="Courier"/>
-              </a:rPr>
-              <a:t>)</a:t>
-            </a:r>
-            <a:r>
-              <a:rPr/>
-              <a:t> or </a:t>
-            </a:r>
-            <a:r>
-              <a:rPr>
-                <a:latin typeface="Courier"/>
-              </a:rPr>
-              <a:t>+</a:t>
-            </a:r>
-            <a:r>
-              <a:rPr/>
-              <a:t> at the </a:t>
-            </a:r>
-            <a:r>
-              <a:rPr i="1"/>
-              <a:t>start</a:t>
-            </a:r>
-            <a:r>
-              <a:rPr/>
-              <a:t> of a line?</a:t>
-            </a:r>
-          </a:p>
-          <a:p>
-            <a:pPr lvl="0" indent="-342900" marL="342900">
-              <a:buAutoNum type="arabicPeriod"/>
-            </a:pPr>
-            <a:r>
-              <a:rPr>
-                <a:latin typeface="Courier"/>
-              </a:rPr>
-              <a:t>?function_name</a:t>
-            </a:r>
-            <a:r>
-              <a:rPr/>
-              <a:t> opens the help page</a:t>
-            </a:r>
-          </a:p>
-          <a:p>
-            <a:pPr lvl="0" indent="-342900" marL="342900">
-              <a:buAutoNum type="arabicPeriod"/>
-            </a:pPr>
-            <a:r>
-              <a:rPr/>
-              <a:t>Bring the </a:t>
-            </a:r>
-            <a:r>
-              <a:rPr b="1"/>
-              <a:t>exact error</a:t>
-            </a:r>
-            <a:r>
-              <a:rPr/>
-              <a:t> (copy-paste it) to class or office hours</a:t>
-            </a:r>
-          </a:p>
-          <a:p>
-            <a:pPr lvl="0" indent="0" marL="0">
-              <a:buNone/>
-            </a:pPr>
-            <a:r>
-              <a:rPr>
-                <a:hlinkClick r:id="rId2"/>
-              </a:rPr>
-              <a:t>📖 R4DS §8 — Workflow: getting help</a:t>
-            </a:r>
-            <a:r>
-              <a:rPr/>
-              <a:t> shows how to write a question others can actually answer.</a:t>
-            </a:r>
-          </a:p>
-          <a:p>
-            <a:pPr lvl="0" indent="0" marL="1270000">
-              <a:buNone/>
-            </a:pPr>
-            <a:r>
-              <a:rPr sz="2000" b="1"/>
-              <a:t>Note</a:t>
-            </a:r>
-          </a:p>
-          <a:p>
-            <a:pPr lvl="0" indent="0" marL="1270000">
-              <a:buNone/>
-            </a:pPr>
-            <a:r>
-              <a:rPr sz="2000" b="1"/>
-              <a:t>✅ Key idea</a:t>
-            </a:r>
-          </a:p>
-          <a:p>
-            <a:pPr lvl="0" indent="0" marL="1270000">
-              <a:buNone/>
-            </a:pPr>
-            <a:r>
-              <a:rPr sz="2000"/>
-              <a:t>Every working scientist googles error messages daily. Getting stuck is not failing — it is the job.</a:t>
             </a:r>
           </a:p>
         </p:txBody>
